--- a/2024/2024-08-02-AI-Updates.pptx
+++ b/2024/2024-08-02-AI-Updates.pptx
@@ -5,7 +5,7 @@
     <p:sldMasterId id="2147483660" r:id="rId1"/>
   </p:sldMasterIdLst>
   <p:notesMasterIdLst>
-    <p:notesMasterId r:id="rId14"/>
+    <p:notesMasterId r:id="rId15"/>
   </p:notesMasterIdLst>
   <p:sldIdLst>
     <p:sldId id="256" r:id="rId2"/>
@@ -20,16 +20,17 @@
     <p:sldId id="265" r:id="rId11"/>
     <p:sldId id="266" r:id="rId12"/>
     <p:sldId id="267" r:id="rId13"/>
+    <p:sldId id="268" r:id="rId14"/>
   </p:sldIdLst>
   <p:sldSz cx="9144000" cy="5143500" type="screen16x9"/>
   <p:notesSz cx="6858000" cy="9144000"/>
   <p:embeddedFontLst>
     <p:embeddedFont>
       <p:font typeface="Roboto Mono" pitchFamily="49" charset="0"/>
-      <p:regular r:id="rId15"/>
-      <p:bold r:id="rId16"/>
-      <p:italic r:id="rId17"/>
-      <p:boldItalic r:id="rId18"/>
+      <p:regular r:id="rId16"/>
+      <p:bold r:id="rId17"/>
+      <p:italic r:id="rId18"/>
+      <p:boldItalic r:id="rId19"/>
     </p:embeddedFont>
   </p:embeddedFontLst>
   <p:defaultTextStyle>
@@ -261,6 +262,11 @@
       </a:defRPr>
     </a:lvl9pPr>
   </p:defaultTextStyle>
+  <p:extLst>
+    <p:ext uri="{EFAFB233-063F-42B5-8137-9DF3F51BA10A}">
+      <p15:sldGuideLst xmlns:p15="http://schemas.microsoft.com/office/powerpoint/2012/main"/>
+    </p:ext>
+  </p:extLst>
 </p:presentation>
 </file>
 
@@ -970,7 +976,7 @@
   <p:cSld>
     <p:spTree>
       <p:nvGrpSpPr>
-        <p:cNvPr id="1" name="Shape 187"/>
+        <p:cNvPr id="1" name="Shape 169"/>
         <p:cNvGrpSpPr/>
         <p:nvPr/>
       </p:nvGrpSpPr>
@@ -984,7 +990,7 @@
       </p:grpSpPr>
       <p:sp>
         <p:nvSpPr>
-          <p:cNvPr id="188" name="Google Shape;188;p21:notes"/>
+          <p:cNvPr id="170" name="Google Shape;170;g2eba0d0ca6f_0_0:notes"/>
           <p:cNvSpPr>
             <a:spLocks noGrp="1" noRot="1" noChangeAspect="1"/>
           </p:cNvSpPr>
@@ -1035,7 +1041,7 @@
       </p:sp>
       <p:sp>
         <p:nvSpPr>
-          <p:cNvPr id="189" name="Google Shape;189;p21:notes"/>
+          <p:cNvPr id="171" name="Google Shape;171;g2eba0d0ca6f_0_0:notes"/>
           <p:cNvSpPr txBox="1">
             <a:spLocks noGrp="1"/>
           </p:cNvSpPr>
@@ -1092,7 +1098,7 @@
   <p:cSld>
     <p:spTree>
       <p:nvGrpSpPr>
-        <p:cNvPr id="1" name="Shape 198"/>
+        <p:cNvPr id="1" name="Shape 196"/>
         <p:cNvGrpSpPr/>
         <p:nvPr/>
       </p:nvGrpSpPr>
@@ -1106,7 +1112,129 @@
       </p:grpSpPr>
       <p:sp>
         <p:nvSpPr>
-          <p:cNvPr id="199" name="Google Shape;199;p22:notes"/>
+          <p:cNvPr id="197" name="Google Shape;197;p21:notes"/>
+          <p:cNvSpPr>
+            <a:spLocks noGrp="1" noRot="1" noChangeAspect="1"/>
+          </p:cNvSpPr>
+          <p:nvPr>
+            <p:ph type="sldImg" idx="2"/>
+          </p:nvPr>
+        </p:nvSpPr>
+        <p:spPr>
+          <a:xfrm>
+            <a:off x="381300" y="685800"/>
+            <a:ext cx="6096000" cy="3429000"/>
+          </a:xfrm>
+          <a:custGeom>
+            <a:avLst/>
+            <a:gdLst/>
+            <a:ahLst/>
+            <a:cxnLst/>
+            <a:rect l="l" t="t" r="r" b="b"/>
+            <a:pathLst>
+              <a:path w="120000" h="120000" extrusionOk="0">
+                <a:moveTo>
+                  <a:pt x="0" y="0"/>
+                </a:moveTo>
+                <a:lnTo>
+                  <a:pt x="120000" y="0"/>
+                </a:lnTo>
+                <a:lnTo>
+                  <a:pt x="120000" y="120000"/>
+                </a:lnTo>
+                <a:lnTo>
+                  <a:pt x="0" y="120000"/>
+                </a:lnTo>
+                <a:close/>
+              </a:path>
+            </a:pathLst>
+          </a:custGeom>
+          <a:noFill/>
+          <a:ln w="9525" cap="flat" cmpd="sng">
+            <a:solidFill>
+              <a:srgbClr val="000000"/>
+            </a:solidFill>
+            <a:prstDash val="solid"/>
+            <a:round/>
+            <a:headEnd type="none" w="sm" len="sm"/>
+            <a:tailEnd type="none" w="sm" len="sm"/>
+          </a:ln>
+        </p:spPr>
+      </p:sp>
+      <p:sp>
+        <p:nvSpPr>
+          <p:cNvPr id="198" name="Google Shape;198;p21:notes"/>
+          <p:cNvSpPr txBox="1">
+            <a:spLocks noGrp="1"/>
+          </p:cNvSpPr>
+          <p:nvPr>
+            <p:ph type="body" idx="1"/>
+          </p:nvPr>
+        </p:nvSpPr>
+        <p:spPr>
+          <a:xfrm>
+            <a:off x="685800" y="4343400"/>
+            <a:ext cx="5486400" cy="4114800"/>
+          </a:xfrm>
+          <a:prstGeom prst="rect">
+            <a:avLst/>
+          </a:prstGeom>
+          <a:noFill/>
+          <a:ln>
+            <a:noFill/>
+          </a:ln>
+        </p:spPr>
+        <p:txBody>
+          <a:bodyPr spcFirstLastPara="1" wrap="square" lIns="91425" tIns="91425" rIns="91425" bIns="91425" anchor="t" anchorCtr="0">
+            <a:noAutofit/>
+          </a:bodyPr>
+          <a:lstStyle/>
+          <a:p>
+            <a:pPr marL="0" lvl="0" indent="0" algn="l" rtl="0">
+              <a:lnSpc>
+                <a:spcPct val="100000"/>
+              </a:lnSpc>
+              <a:spcBef>
+                <a:spcPts val="0"/>
+              </a:spcBef>
+              <a:spcAft>
+                <a:spcPts val="0"/>
+              </a:spcAft>
+              <a:buSzPts val="1100"/>
+              <a:buNone/>
+            </a:pPr>
+            <a:endParaRPr/>
+          </a:p>
+        </p:txBody>
+      </p:sp>
+    </p:spTree>
+  </p:cSld>
+  <p:clrMapOvr>
+    <a:masterClrMapping/>
+  </p:clrMapOvr>
+</p:notes>
+</file>
+
+<file path=ppt/notesSlides/notesSlide12.xml><?xml version="1.0" encoding="utf-8"?>
+<p:notes xmlns:a="http://schemas.openxmlformats.org/drawingml/2006/main" xmlns:r="http://schemas.openxmlformats.org/officeDocument/2006/relationships" xmlns:p="http://schemas.openxmlformats.org/presentationml/2006/main" showMasterSp="0" showMasterPhAnim="0">
+  <p:cSld>
+    <p:spTree>
+      <p:nvGrpSpPr>
+        <p:cNvPr id="1" name="Shape 207"/>
+        <p:cNvGrpSpPr/>
+        <p:nvPr/>
+      </p:nvGrpSpPr>
+      <p:grpSpPr>
+        <a:xfrm>
+          <a:off x="0" y="0"/>
+          <a:ext cx="0" cy="0"/>
+          <a:chOff x="0" y="0"/>
+          <a:chExt cx="0" cy="0"/>
+        </a:xfrm>
+      </p:grpSpPr>
+      <p:sp>
+        <p:nvSpPr>
+          <p:cNvPr id="208" name="Google Shape;208;p22:notes"/>
           <p:cNvSpPr>
             <a:spLocks noGrp="1" noRot="1" noChangeAspect="1"/>
           </p:cNvSpPr>
@@ -1157,7 +1285,7 @@
       </p:sp>
       <p:sp>
         <p:nvSpPr>
-          <p:cNvPr id="200" name="Google Shape;200;p22:notes"/>
+          <p:cNvPr id="209" name="Google Shape;209;p22:notes"/>
           <p:cNvSpPr txBox="1">
             <a:spLocks noGrp="1"/>
           </p:cNvSpPr>
@@ -1209,12 +1337,12 @@
 </p:notes>
 </file>
 
-<file path=ppt/notesSlides/notesSlide12.xml><?xml version="1.0" encoding="utf-8"?>
+<file path=ppt/notesSlides/notesSlide13.xml><?xml version="1.0" encoding="utf-8"?>
 <p:notes xmlns:a="http://schemas.openxmlformats.org/drawingml/2006/main" xmlns:r="http://schemas.openxmlformats.org/officeDocument/2006/relationships" xmlns:p="http://schemas.openxmlformats.org/presentationml/2006/main" showMasterSp="0" showMasterPhAnim="0">
   <p:cSld>
     <p:spTree>
       <p:nvGrpSpPr>
-        <p:cNvPr id="1" name="Shape 208"/>
+        <p:cNvPr id="1" name="Shape 217"/>
         <p:cNvGrpSpPr/>
         <p:nvPr/>
       </p:nvGrpSpPr>
@@ -1228,7 +1356,7 @@
       </p:grpSpPr>
       <p:sp>
         <p:nvSpPr>
-          <p:cNvPr id="209" name="Google Shape;209;p23:notes"/>
+          <p:cNvPr id="218" name="Google Shape;218;p23:notes"/>
           <p:cNvSpPr>
             <a:spLocks noGrp="1" noRot="1" noChangeAspect="1"/>
           </p:cNvSpPr>
@@ -1279,7 +1407,7 @@
       </p:sp>
       <p:sp>
         <p:nvSpPr>
-          <p:cNvPr id="210" name="Google Shape;210;p23:notes"/>
+          <p:cNvPr id="219" name="Google Shape;219;p23:notes"/>
           <p:cNvSpPr txBox="1">
             <a:spLocks noGrp="1"/>
           </p:cNvSpPr>
@@ -1970,7 +2098,7 @@
         </p:nvSpPr>
         <p:spPr>
           <a:xfrm>
-            <a:off x="381000" y="685800"/>
+            <a:off x="381300" y="685800"/>
             <a:ext cx="6096000" cy="3429000"/>
           </a:xfrm>
           <a:custGeom>
@@ -2068,7 +2196,7 @@
   <p:cSld>
     <p:spTree>
       <p:nvGrpSpPr>
-        <p:cNvPr id="1" name="Shape 135"/>
+        <p:cNvPr id="1" name="Shape 136"/>
         <p:cNvGrpSpPr/>
         <p:nvPr/>
       </p:nvGrpSpPr>
@@ -2082,7 +2210,7 @@
       </p:grpSpPr>
       <p:sp>
         <p:nvSpPr>
-          <p:cNvPr id="136" name="Google Shape;136;g2e8a450c44d_0_185:notes"/>
+          <p:cNvPr id="137" name="Google Shape;137;g279dde1f7ab_0_4:notes"/>
           <p:cNvSpPr>
             <a:spLocks noGrp="1" noRot="1" noChangeAspect="1"/>
           </p:cNvSpPr>
@@ -2133,7 +2261,7 @@
       </p:sp>
       <p:sp>
         <p:nvSpPr>
-          <p:cNvPr id="137" name="Google Shape;137;g2e8a450c44d_0_185:notes"/>
+          <p:cNvPr id="138" name="Google Shape;138;g279dde1f7ab_0_4:notes"/>
           <p:cNvSpPr txBox="1">
             <a:spLocks noGrp="1"/>
           </p:cNvSpPr>
@@ -2190,7 +2318,7 @@
   <p:cSld>
     <p:spTree>
       <p:nvGrpSpPr>
-        <p:cNvPr id="1" name="Shape 160"/>
+        <p:cNvPr id="1" name="Shape 144"/>
         <p:cNvGrpSpPr/>
         <p:nvPr/>
       </p:nvGrpSpPr>
@@ -2204,7 +2332,7 @@
       </p:grpSpPr>
       <p:sp>
         <p:nvSpPr>
-          <p:cNvPr id="161" name="Google Shape;161;g2eba0d0ca6f_0_0:notes"/>
+          <p:cNvPr id="145" name="Google Shape;145;g2e8a450c44d_0_185:notes"/>
           <p:cNvSpPr>
             <a:spLocks noGrp="1" noRot="1" noChangeAspect="1"/>
           </p:cNvSpPr>
@@ -2255,7 +2383,7 @@
       </p:sp>
       <p:sp>
         <p:nvSpPr>
-          <p:cNvPr id="162" name="Google Shape;162;g2eba0d0ca6f_0_0:notes"/>
+          <p:cNvPr id="146" name="Google Shape;146;g2e8a450c44d_0_185:notes"/>
           <p:cNvSpPr txBox="1">
             <a:spLocks noGrp="1"/>
           </p:cNvSpPr>
@@ -10367,7 +10495,7 @@
         </p:nvSpPr>
         <p:spPr>
           <a:xfrm>
-            <a:off x="83860" y="1284725"/>
+            <a:off x="83860" y="1056125"/>
             <a:ext cx="4420200" cy="3648000"/>
           </a:xfrm>
           <a:prstGeom prst="rect">
@@ -10999,8 +11127,8 @@
         </p:nvSpPr>
         <p:spPr>
           <a:xfrm>
-            <a:off x="4633738" y="1284719"/>
-            <a:ext cx="4420200" cy="2724300"/>
+            <a:off x="4633738" y="1056119"/>
+            <a:ext cx="4420200" cy="3648000"/>
           </a:xfrm>
           <a:prstGeom prst="rect">
             <a:avLst/>
@@ -11409,6 +11537,166 @@
                 <a:cs typeface="Calibri"/>
                 <a:sym typeface="Calibri"/>
               </a:rPr>
+              <a:t>Mark Zuckerberg "Inflection Point" post</a:t>
+            </a:r>
+            <a:endParaRPr sz="1500" b="1">
+              <a:solidFill>
+                <a:srgbClr val="3C78D8"/>
+              </a:solidFill>
+              <a:latin typeface="Calibri"/>
+              <a:ea typeface="Calibri"/>
+              <a:cs typeface="Calibri"/>
+              <a:sym typeface="Calibri"/>
+            </a:endParaRPr>
+          </a:p>
+          <a:p>
+            <a:pPr marL="228600" marR="0" lvl="0" indent="-209550" algn="l" rtl="0">
+              <a:lnSpc>
+                <a:spcPct val="100000"/>
+              </a:lnSpc>
+              <a:spcBef>
+                <a:spcPts val="0"/>
+              </a:spcBef>
+              <a:spcAft>
+                <a:spcPts val="0"/>
+              </a:spcAft>
+              <a:buClr>
+                <a:srgbClr val="3C78D8"/>
+              </a:buClr>
+              <a:buSzPts val="1500"/>
+              <a:buFont typeface="Calibri"/>
+              <a:buChar char="●"/>
+            </a:pPr>
+            <a:r>
+              <a:rPr lang="en" sz="1500" b="1">
+                <a:solidFill>
+                  <a:srgbClr val="3C78D8"/>
+                </a:solidFill>
+                <a:latin typeface="Calibri"/>
+                <a:ea typeface="Calibri"/>
+                <a:cs typeface="Calibri"/>
+                <a:sym typeface="Calibri"/>
+              </a:rPr>
+              <a:t>GraphRAG  +  AutoGen  +  Ollama  +  Chainlit </a:t>
+            </a:r>
+            <a:endParaRPr sz="1500" b="1">
+              <a:solidFill>
+                <a:srgbClr val="3C78D8"/>
+              </a:solidFill>
+              <a:latin typeface="Calibri"/>
+              <a:ea typeface="Calibri"/>
+              <a:cs typeface="Calibri"/>
+              <a:sym typeface="Calibri"/>
+            </a:endParaRPr>
+          </a:p>
+          <a:p>
+            <a:pPr marL="228600" marR="0" lvl="0" indent="-209550" algn="l" rtl="0">
+              <a:lnSpc>
+                <a:spcPct val="100000"/>
+              </a:lnSpc>
+              <a:spcBef>
+                <a:spcPts val="0"/>
+              </a:spcBef>
+              <a:spcAft>
+                <a:spcPts val="0"/>
+              </a:spcAft>
+              <a:buClr>
+                <a:srgbClr val="3C78D8"/>
+              </a:buClr>
+              <a:buSzPts val="1500"/>
+              <a:buFont typeface="Calibri"/>
+              <a:buChar char="●"/>
+            </a:pPr>
+            <a:r>
+              <a:rPr lang="en" sz="1500" b="1">
+                <a:solidFill>
+                  <a:srgbClr val="3C78D8"/>
+                </a:solidFill>
+                <a:latin typeface="Calibri"/>
+                <a:ea typeface="Calibri"/>
+                <a:cs typeface="Calibri"/>
+                <a:sym typeface="Calibri"/>
+              </a:rPr>
+              <a:t>OpenAI Talking ChatGPT Bot </a:t>
+            </a:r>
+            <a:endParaRPr sz="1500" b="1">
+              <a:solidFill>
+                <a:srgbClr val="3C78D8"/>
+              </a:solidFill>
+              <a:latin typeface="Calibri"/>
+              <a:ea typeface="Calibri"/>
+              <a:cs typeface="Calibri"/>
+              <a:sym typeface="Calibri"/>
+            </a:endParaRPr>
+          </a:p>
+          <a:p>
+            <a:pPr marL="228600" marR="0" lvl="0" indent="-209550" algn="l" rtl="0">
+              <a:lnSpc>
+                <a:spcPct val="100000"/>
+              </a:lnSpc>
+              <a:spcBef>
+                <a:spcPts val="0"/>
+              </a:spcBef>
+              <a:spcAft>
+                <a:spcPts val="0"/>
+              </a:spcAft>
+              <a:buClr>
+                <a:srgbClr val="3C78D8"/>
+              </a:buClr>
+              <a:buSzPts val="1500"/>
+              <a:buFont typeface="Calibri"/>
+              <a:buChar char="●"/>
+            </a:pPr>
+            <a:r>
+              <a:rPr lang="en" sz="1500" b="1">
+                <a:solidFill>
+                  <a:srgbClr val="3C78D8"/>
+                </a:solidFill>
+                <a:latin typeface="Calibri"/>
+                <a:ea typeface="Calibri"/>
+                <a:cs typeface="Calibri"/>
+                <a:sym typeface="Calibri"/>
+              </a:rPr>
+              <a:t>Meta AI Studio - create custom AI</a:t>
+            </a:r>
+            <a:endParaRPr sz="1500" b="1">
+              <a:solidFill>
+                <a:srgbClr val="3C78D8"/>
+              </a:solidFill>
+              <a:latin typeface="Calibri"/>
+              <a:ea typeface="Calibri"/>
+              <a:cs typeface="Calibri"/>
+              <a:sym typeface="Calibri"/>
+            </a:endParaRPr>
+          </a:p>
+          <a:p>
+            <a:pPr marL="228600" marR="0" lvl="0" indent="-209550" algn="l" rtl="0">
+              <a:lnSpc>
+                <a:spcPct val="100000"/>
+              </a:lnSpc>
+              <a:spcBef>
+                <a:spcPts val="0"/>
+              </a:spcBef>
+              <a:spcAft>
+                <a:spcPts val="0"/>
+              </a:spcAft>
+              <a:buClr>
+                <a:srgbClr val="3C78D8"/>
+              </a:buClr>
+              <a:buSzPts val="1500"/>
+              <a:buFont typeface="Calibri"/>
+              <a:buChar char="●"/>
+            </a:pPr>
+            <a:r>
+              <a:rPr lang="en" sz="1500" b="1">
+                <a:solidFill>
+                  <a:srgbClr val="3C78D8"/>
+                </a:solidFill>
+                <a:latin typeface="Calibri"/>
+                <a:ea typeface="Calibri"/>
+                <a:cs typeface="Calibri"/>
+                <a:sym typeface="Calibri"/>
+              </a:rPr>
               <a:t>Crowd-sourced "Arena" Leaderboard</a:t>
             </a:r>
             <a:endParaRPr sz="1500" b="1">
@@ -11471,7 +11759,7 @@
         </p:nvSpPr>
         <p:spPr>
           <a:xfrm>
-            <a:off x="1151375" y="131100"/>
+            <a:off x="1024350" y="16125"/>
             <a:ext cx="2539200" cy="942000"/>
           </a:xfrm>
           <a:prstGeom prst="rect">
@@ -11589,7 +11877,7 @@
         </p:nvSpPr>
         <p:spPr>
           <a:xfrm>
-            <a:off x="4075600" y="173025"/>
+            <a:off x="4075600" y="96825"/>
             <a:ext cx="4978500" cy="785100"/>
           </a:xfrm>
           <a:prstGeom prst="rect">
@@ -11709,7 +11997,1477 @@
   <p:cSld>
     <p:spTree>
       <p:nvGrpSpPr>
-        <p:cNvPr id="1" name="Shape 190"/>
+        <p:cNvPr id="1" name="Shape 172"/>
+        <p:cNvGrpSpPr/>
+        <p:nvPr/>
+      </p:nvGrpSpPr>
+      <p:grpSpPr>
+        <a:xfrm>
+          <a:off x="0" y="0"/>
+          <a:ext cx="0" cy="0"/>
+          <a:chOff x="0" y="0"/>
+          <a:chExt cx="0" cy="0"/>
+        </a:xfrm>
+      </p:grpSpPr>
+      <p:sp>
+        <p:nvSpPr>
+          <p:cNvPr id="173" name="Google Shape;173;p23"/>
+          <p:cNvSpPr txBox="1"/>
+          <p:nvPr/>
+        </p:nvSpPr>
+        <p:spPr>
+          <a:xfrm>
+            <a:off x="5439489" y="55350"/>
+            <a:ext cx="1761300" cy="526500"/>
+          </a:xfrm>
+          <a:prstGeom prst="rect">
+            <a:avLst/>
+          </a:prstGeom>
+          <a:noFill/>
+          <a:ln>
+            <a:noFill/>
+          </a:ln>
+        </p:spPr>
+        <p:txBody>
+          <a:bodyPr spcFirstLastPara="1" wrap="square" lIns="9125" tIns="9125" rIns="9125" bIns="9125" anchor="t" anchorCtr="0">
+            <a:spAutoFit/>
+          </a:bodyPr>
+          <a:lstStyle/>
+          <a:p>
+            <a:pPr marL="0" marR="0" lvl="0" indent="0" algn="l" rtl="0">
+              <a:lnSpc>
+                <a:spcPct val="100000"/>
+              </a:lnSpc>
+              <a:spcBef>
+                <a:spcPts val="0"/>
+              </a:spcBef>
+              <a:spcAft>
+                <a:spcPts val="0"/>
+              </a:spcAft>
+              <a:buClr>
+                <a:schemeClr val="dk1"/>
+              </a:buClr>
+              <a:buSzPts val="1100"/>
+              <a:buFont typeface="Arial"/>
+              <a:buNone/>
+            </a:pPr>
+            <a:r>
+              <a:rPr lang="en" sz="1100">
+                <a:solidFill>
+                  <a:srgbClr val="1F2937"/>
+                </a:solidFill>
+                <a:highlight>
+                  <a:srgbClr val="FFFFFF"/>
+                </a:highlight>
+                <a:latin typeface="Calibri"/>
+                <a:ea typeface="Calibri"/>
+                <a:cs typeface="Calibri"/>
+                <a:sym typeface="Calibri"/>
+              </a:rPr>
+              <a:t>Total #models: 115.    </a:t>
+            </a:r>
+            <a:endParaRPr sz="1100">
+              <a:solidFill>
+                <a:srgbClr val="1F2937"/>
+              </a:solidFill>
+              <a:highlight>
+                <a:srgbClr val="FFFFFF"/>
+              </a:highlight>
+              <a:latin typeface="Calibri"/>
+              <a:ea typeface="Calibri"/>
+              <a:cs typeface="Calibri"/>
+              <a:sym typeface="Calibri"/>
+            </a:endParaRPr>
+          </a:p>
+          <a:p>
+            <a:pPr marL="0" marR="0" lvl="0" indent="0" algn="l" rtl="0">
+              <a:lnSpc>
+                <a:spcPct val="100000"/>
+              </a:lnSpc>
+              <a:spcBef>
+                <a:spcPts val="0"/>
+              </a:spcBef>
+              <a:spcAft>
+                <a:spcPts val="0"/>
+              </a:spcAft>
+              <a:buClr>
+                <a:schemeClr val="dk1"/>
+              </a:buClr>
+              <a:buSzPts val="1100"/>
+              <a:buFont typeface="Arial"/>
+              <a:buNone/>
+            </a:pPr>
+            <a:r>
+              <a:rPr lang="en" sz="1100">
+                <a:solidFill>
+                  <a:srgbClr val="1F2937"/>
+                </a:solidFill>
+                <a:highlight>
+                  <a:srgbClr val="FFFFFF"/>
+                </a:highlight>
+                <a:latin typeface="Calibri"/>
+                <a:ea typeface="Calibri"/>
+                <a:cs typeface="Calibri"/>
+                <a:sym typeface="Calibri"/>
+              </a:rPr>
+              <a:t>Total #votes: 1,450,208. </a:t>
+            </a:r>
+            <a:endParaRPr sz="1100">
+              <a:solidFill>
+                <a:srgbClr val="1F2937"/>
+              </a:solidFill>
+              <a:highlight>
+                <a:srgbClr val="FFFFFF"/>
+              </a:highlight>
+              <a:latin typeface="Calibri"/>
+              <a:ea typeface="Calibri"/>
+              <a:cs typeface="Calibri"/>
+              <a:sym typeface="Calibri"/>
+            </a:endParaRPr>
+          </a:p>
+          <a:p>
+            <a:pPr marL="0" marR="0" lvl="0" indent="0" algn="l" rtl="0">
+              <a:lnSpc>
+                <a:spcPct val="100000"/>
+              </a:lnSpc>
+              <a:spcBef>
+                <a:spcPts val="0"/>
+              </a:spcBef>
+              <a:spcAft>
+                <a:spcPts val="0"/>
+              </a:spcAft>
+              <a:buClr>
+                <a:schemeClr val="dk1"/>
+              </a:buClr>
+              <a:buSzPts val="1100"/>
+              <a:buFont typeface="Arial"/>
+              <a:buNone/>
+            </a:pPr>
+            <a:r>
+              <a:rPr lang="en" sz="1100">
+                <a:solidFill>
+                  <a:srgbClr val="1F2937"/>
+                </a:solidFill>
+                <a:highlight>
+                  <a:srgbClr val="FFFFFF"/>
+                </a:highlight>
+                <a:latin typeface="Calibri"/>
+                <a:ea typeface="Calibri"/>
+                <a:cs typeface="Calibri"/>
+                <a:sym typeface="Calibri"/>
+              </a:rPr>
+              <a:t>Last updated: 2024-07-08.</a:t>
+            </a:r>
+            <a:endParaRPr sz="1100" b="1">
+              <a:solidFill>
+                <a:srgbClr val="FF0000"/>
+              </a:solidFill>
+              <a:latin typeface="Calibri"/>
+              <a:ea typeface="Calibri"/>
+              <a:cs typeface="Calibri"/>
+              <a:sym typeface="Calibri"/>
+            </a:endParaRPr>
+          </a:p>
+        </p:txBody>
+      </p:sp>
+      <p:sp>
+        <p:nvSpPr>
+          <p:cNvPr id="174" name="Google Shape;174;p23"/>
+          <p:cNvSpPr txBox="1"/>
+          <p:nvPr/>
+        </p:nvSpPr>
+        <p:spPr>
+          <a:xfrm>
+            <a:off x="7261325" y="52350"/>
+            <a:ext cx="1831500" cy="387900"/>
+          </a:xfrm>
+          <a:prstGeom prst="rect">
+            <a:avLst/>
+          </a:prstGeom>
+          <a:solidFill>
+            <a:srgbClr val="FFF2CC"/>
+          </a:solidFill>
+          <a:ln w="9525" cap="flat" cmpd="sng">
+            <a:solidFill>
+              <a:srgbClr val="FF0000"/>
+            </a:solidFill>
+            <a:prstDash val="solid"/>
+            <a:round/>
+            <a:headEnd type="none" w="sm" len="sm"/>
+            <a:tailEnd type="none" w="sm" len="sm"/>
+          </a:ln>
+        </p:spPr>
+        <p:txBody>
+          <a:bodyPr spcFirstLastPara="1" wrap="square" lIns="9125" tIns="9125" rIns="9125" bIns="9125" anchor="t" anchorCtr="0">
+            <a:spAutoFit/>
+          </a:bodyPr>
+          <a:lstStyle/>
+          <a:p>
+            <a:pPr marL="0" marR="0" lvl="0" indent="0" algn="l" rtl="0">
+              <a:lnSpc>
+                <a:spcPct val="100000"/>
+              </a:lnSpc>
+              <a:spcBef>
+                <a:spcPts val="0"/>
+              </a:spcBef>
+              <a:spcAft>
+                <a:spcPts val="0"/>
+              </a:spcAft>
+              <a:buClr>
+                <a:schemeClr val="dk1"/>
+              </a:buClr>
+              <a:buSzPts val="1100"/>
+              <a:buFont typeface="Arial"/>
+              <a:buNone/>
+            </a:pPr>
+            <a:r>
+              <a:rPr lang="en" sz="1200" b="0" i="0" u="none" strike="noStrike" cap="none">
+                <a:solidFill>
+                  <a:schemeClr val="dk1"/>
+                </a:solidFill>
+                <a:latin typeface="Calibri"/>
+                <a:ea typeface="Calibri"/>
+                <a:cs typeface="Calibri"/>
+                <a:sym typeface="Calibri"/>
+              </a:rPr>
+              <a:t>Starting Elo rating = 1000</a:t>
+            </a:r>
+            <a:endParaRPr sz="1200" b="0" i="0" u="none" strike="noStrike" cap="none">
+              <a:solidFill>
+                <a:schemeClr val="dk1"/>
+              </a:solidFill>
+              <a:latin typeface="Calibri"/>
+              <a:ea typeface="Calibri"/>
+              <a:cs typeface="Calibri"/>
+              <a:sym typeface="Calibri"/>
+            </a:endParaRPr>
+          </a:p>
+          <a:p>
+            <a:pPr marL="0" marR="0" lvl="0" indent="0" algn="l" rtl="0">
+              <a:lnSpc>
+                <a:spcPct val="100000"/>
+              </a:lnSpc>
+              <a:spcBef>
+                <a:spcPts val="0"/>
+              </a:spcBef>
+              <a:spcAft>
+                <a:spcPts val="0"/>
+              </a:spcAft>
+              <a:buClr>
+                <a:schemeClr val="dk1"/>
+              </a:buClr>
+              <a:buSzPts val="1100"/>
+              <a:buFont typeface="Arial"/>
+              <a:buNone/>
+            </a:pPr>
+            <a:r>
+              <a:rPr lang="en" sz="1200" b="0" i="0" u="none" strike="noStrike" cap="none">
+                <a:solidFill>
+                  <a:schemeClr val="dk1"/>
+                </a:solidFill>
+                <a:latin typeface="Calibri"/>
+                <a:ea typeface="Calibri"/>
+                <a:cs typeface="Calibri"/>
+                <a:sym typeface="Calibri"/>
+              </a:rPr>
+              <a:t>95% CI = Confidence Interval</a:t>
+            </a:r>
+            <a:endParaRPr sz="1200" b="0" i="0" u="none" strike="noStrike" cap="none">
+              <a:solidFill>
+                <a:schemeClr val="dk1"/>
+              </a:solidFill>
+              <a:latin typeface="Calibri"/>
+              <a:ea typeface="Calibri"/>
+              <a:cs typeface="Calibri"/>
+              <a:sym typeface="Calibri"/>
+            </a:endParaRPr>
+          </a:p>
+        </p:txBody>
+      </p:sp>
+      <p:sp>
+        <p:nvSpPr>
+          <p:cNvPr id="175" name="Google Shape;175;p23"/>
+          <p:cNvSpPr txBox="1"/>
+          <p:nvPr/>
+        </p:nvSpPr>
+        <p:spPr>
+          <a:xfrm>
+            <a:off x="-38048" y="-108050"/>
+            <a:ext cx="4151700" cy="492600"/>
+          </a:xfrm>
+          <a:prstGeom prst="rect">
+            <a:avLst/>
+          </a:prstGeom>
+          <a:noFill/>
+          <a:ln>
+            <a:noFill/>
+          </a:ln>
+        </p:spPr>
+        <p:txBody>
+          <a:bodyPr spcFirstLastPara="1" wrap="square" lIns="91425" tIns="91425" rIns="91425" bIns="91425" anchor="t" anchorCtr="0">
+            <a:spAutoFit/>
+          </a:bodyPr>
+          <a:lstStyle/>
+          <a:p>
+            <a:pPr marL="0" marR="0" lvl="0" indent="0" algn="l" rtl="0">
+              <a:lnSpc>
+                <a:spcPct val="100000"/>
+              </a:lnSpc>
+              <a:spcBef>
+                <a:spcPts val="0"/>
+              </a:spcBef>
+              <a:spcAft>
+                <a:spcPts val="0"/>
+              </a:spcAft>
+              <a:buClr>
+                <a:srgbClr val="000000"/>
+              </a:buClr>
+              <a:buSzPts val="2000"/>
+              <a:buFont typeface="Arial"/>
+              <a:buNone/>
+            </a:pPr>
+            <a:r>
+              <a:rPr lang="en" sz="2000" b="1" i="0" u="none" strike="noStrike" cap="none">
+                <a:solidFill>
+                  <a:schemeClr val="dk1"/>
+                </a:solidFill>
+                <a:latin typeface="Calibri"/>
+                <a:ea typeface="Calibri"/>
+                <a:cs typeface="Calibri"/>
+                <a:sym typeface="Calibri"/>
+              </a:rPr>
+              <a:t>Crowd-sourced "Arena" Leaderboard</a:t>
+            </a:r>
+            <a:endParaRPr sz="2000" b="1" i="0" u="none" strike="noStrike" cap="none">
+              <a:solidFill>
+                <a:srgbClr val="000000"/>
+              </a:solidFill>
+              <a:latin typeface="Calibri"/>
+              <a:ea typeface="Calibri"/>
+              <a:cs typeface="Calibri"/>
+              <a:sym typeface="Calibri"/>
+            </a:endParaRPr>
+          </a:p>
+        </p:txBody>
+      </p:sp>
+      <p:sp>
+        <p:nvSpPr>
+          <p:cNvPr id="176" name="Google Shape;176;p23"/>
+          <p:cNvSpPr txBox="1"/>
+          <p:nvPr/>
+        </p:nvSpPr>
+        <p:spPr>
+          <a:xfrm>
+            <a:off x="0" y="157800"/>
+            <a:ext cx="2076900" cy="338700"/>
+          </a:xfrm>
+          <a:prstGeom prst="rect">
+            <a:avLst/>
+          </a:prstGeom>
+          <a:noFill/>
+          <a:ln>
+            <a:noFill/>
+          </a:ln>
+        </p:spPr>
+        <p:txBody>
+          <a:bodyPr spcFirstLastPara="1" wrap="square" lIns="91425" tIns="91425" rIns="91425" bIns="91425" anchor="t" anchorCtr="0">
+            <a:spAutoFit/>
+          </a:bodyPr>
+          <a:lstStyle/>
+          <a:p>
+            <a:pPr marL="0" marR="0" lvl="0" indent="0" algn="l" rtl="0">
+              <a:lnSpc>
+                <a:spcPct val="100000"/>
+              </a:lnSpc>
+              <a:spcBef>
+                <a:spcPts val="0"/>
+              </a:spcBef>
+              <a:spcAft>
+                <a:spcPts val="0"/>
+              </a:spcAft>
+              <a:buClr>
+                <a:schemeClr val="dk1"/>
+              </a:buClr>
+              <a:buSzPts val="1100"/>
+              <a:buFont typeface="Arial"/>
+              <a:buNone/>
+            </a:pPr>
+            <a:r>
+              <a:rPr lang="en" sz="1000" u="sng">
+                <a:solidFill>
+                  <a:schemeClr val="hlink"/>
+                </a:solidFill>
+                <a:latin typeface="Calibri"/>
+                <a:ea typeface="Calibri"/>
+                <a:cs typeface="Calibri"/>
+                <a:sym typeface="Calibri"/>
+                <a:hlinkClick r:id="rId3"/>
+              </a:rPr>
+              <a:t>https://chat.lmsys.org/?leaderboard</a:t>
+            </a:r>
+            <a:r>
+              <a:rPr lang="en" sz="1000">
+                <a:solidFill>
+                  <a:schemeClr val="dk1"/>
+                </a:solidFill>
+                <a:latin typeface="Calibri"/>
+                <a:ea typeface="Calibri"/>
+                <a:cs typeface="Calibri"/>
+                <a:sym typeface="Calibri"/>
+              </a:rPr>
+              <a:t> </a:t>
+            </a:r>
+            <a:r>
+              <a:rPr lang="en" sz="1000" b="0" i="0" u="none" strike="noStrike" cap="none">
+                <a:solidFill>
+                  <a:schemeClr val="dk1"/>
+                </a:solidFill>
+                <a:latin typeface="Calibri"/>
+                <a:ea typeface="Calibri"/>
+                <a:cs typeface="Calibri"/>
+                <a:sym typeface="Calibri"/>
+              </a:rPr>
+              <a:t> </a:t>
+            </a:r>
+            <a:endParaRPr sz="1000" b="0" i="0" u="none" strike="noStrike" cap="none">
+              <a:solidFill>
+                <a:schemeClr val="dk1"/>
+              </a:solidFill>
+              <a:latin typeface="Calibri"/>
+              <a:ea typeface="Calibri"/>
+              <a:cs typeface="Calibri"/>
+              <a:sym typeface="Calibri"/>
+            </a:endParaRPr>
+          </a:p>
+        </p:txBody>
+      </p:sp>
+      <p:sp>
+        <p:nvSpPr>
+          <p:cNvPr id="177" name="Google Shape;177;p23"/>
+          <p:cNvSpPr txBox="1"/>
+          <p:nvPr/>
+        </p:nvSpPr>
+        <p:spPr>
+          <a:xfrm>
+            <a:off x="3186581" y="444363"/>
+            <a:ext cx="552300" cy="203100"/>
+          </a:xfrm>
+          <a:prstGeom prst="rect">
+            <a:avLst/>
+          </a:prstGeom>
+          <a:solidFill>
+            <a:srgbClr val="FFF2CC"/>
+          </a:solidFill>
+          <a:ln w="9525" cap="flat" cmpd="sng">
+            <a:solidFill>
+              <a:srgbClr val="FF0000"/>
+            </a:solidFill>
+            <a:prstDash val="solid"/>
+            <a:round/>
+            <a:headEnd type="none" w="sm" len="sm"/>
+            <a:tailEnd type="none" w="sm" len="sm"/>
+          </a:ln>
+        </p:spPr>
+        <p:txBody>
+          <a:bodyPr spcFirstLastPara="1" wrap="square" lIns="9125" tIns="9125" rIns="9125" bIns="9125" anchor="t" anchorCtr="0">
+            <a:spAutoFit/>
+          </a:bodyPr>
+          <a:lstStyle/>
+          <a:p>
+            <a:pPr marL="0" marR="0" lvl="0" indent="0" algn="ctr" rtl="0">
+              <a:lnSpc>
+                <a:spcPct val="100000"/>
+              </a:lnSpc>
+              <a:spcBef>
+                <a:spcPts val="0"/>
+              </a:spcBef>
+              <a:spcAft>
+                <a:spcPts val="0"/>
+              </a:spcAft>
+              <a:buClr>
+                <a:schemeClr val="dk1"/>
+              </a:buClr>
+              <a:buSzPts val="1100"/>
+              <a:buFont typeface="Arial"/>
+              <a:buNone/>
+            </a:pPr>
+            <a:r>
+              <a:rPr lang="en" sz="1200" b="1">
+                <a:solidFill>
+                  <a:srgbClr val="FF0000"/>
+                </a:solidFill>
+                <a:latin typeface="Calibri"/>
+                <a:ea typeface="Calibri"/>
+                <a:cs typeface="Calibri"/>
+                <a:sym typeface="Calibri"/>
+              </a:rPr>
+              <a:t>Coding</a:t>
+            </a:r>
+            <a:endParaRPr sz="1200">
+              <a:solidFill>
+                <a:schemeClr val="dk1"/>
+              </a:solidFill>
+              <a:latin typeface="Calibri"/>
+              <a:ea typeface="Calibri"/>
+              <a:cs typeface="Calibri"/>
+              <a:sym typeface="Calibri"/>
+            </a:endParaRPr>
+          </a:p>
+        </p:txBody>
+      </p:sp>
+      <p:sp>
+        <p:nvSpPr>
+          <p:cNvPr id="178" name="Google Shape;178;p23"/>
+          <p:cNvSpPr/>
+          <p:nvPr/>
+        </p:nvSpPr>
+        <p:spPr>
+          <a:xfrm>
+            <a:off x="5235575" y="226378"/>
+            <a:ext cx="125400" cy="125400"/>
+          </a:xfrm>
+          <a:prstGeom prst="ellipse">
+            <a:avLst/>
+          </a:prstGeom>
+          <a:solidFill>
+            <a:srgbClr val="6AA84F"/>
+          </a:solidFill>
+          <a:ln w="9525" cap="flat" cmpd="sng">
+            <a:solidFill>
+              <a:schemeClr val="dk2"/>
+            </a:solidFill>
+            <a:prstDash val="solid"/>
+            <a:round/>
+            <a:headEnd type="none" w="sm" len="sm"/>
+            <a:tailEnd type="none" w="sm" len="sm"/>
+          </a:ln>
+        </p:spPr>
+        <p:txBody>
+          <a:bodyPr spcFirstLastPara="1" wrap="square" lIns="91425" tIns="91425" rIns="91425" bIns="91425" anchor="ctr" anchorCtr="0">
+            <a:noAutofit/>
+          </a:bodyPr>
+          <a:lstStyle/>
+          <a:p>
+            <a:pPr marL="0" lvl="0" indent="0" algn="ctr" rtl="0">
+              <a:spcBef>
+                <a:spcPts val="0"/>
+              </a:spcBef>
+              <a:spcAft>
+                <a:spcPts val="0"/>
+              </a:spcAft>
+              <a:buNone/>
+            </a:pPr>
+            <a:endParaRPr/>
+          </a:p>
+        </p:txBody>
+      </p:sp>
+      <p:sp>
+        <p:nvSpPr>
+          <p:cNvPr id="179" name="Google Shape;179;p23"/>
+          <p:cNvSpPr/>
+          <p:nvPr/>
+        </p:nvSpPr>
+        <p:spPr>
+          <a:xfrm>
+            <a:off x="448325" y="4306024"/>
+            <a:ext cx="125400" cy="125400"/>
+          </a:xfrm>
+          <a:prstGeom prst="ellipse">
+            <a:avLst/>
+          </a:prstGeom>
+          <a:solidFill>
+            <a:srgbClr val="6AA84F"/>
+          </a:solidFill>
+          <a:ln w="9525" cap="flat" cmpd="sng">
+            <a:solidFill>
+              <a:schemeClr val="dk2"/>
+            </a:solidFill>
+            <a:prstDash val="solid"/>
+            <a:round/>
+            <a:headEnd type="none" w="sm" len="sm"/>
+            <a:tailEnd type="none" w="sm" len="sm"/>
+          </a:ln>
+        </p:spPr>
+        <p:txBody>
+          <a:bodyPr spcFirstLastPara="1" wrap="square" lIns="91425" tIns="91425" rIns="91425" bIns="91425" anchor="ctr" anchorCtr="0">
+            <a:noAutofit/>
+          </a:bodyPr>
+          <a:lstStyle/>
+          <a:p>
+            <a:pPr marL="0" lvl="0" indent="0" algn="ctr" rtl="0">
+              <a:spcBef>
+                <a:spcPts val="0"/>
+              </a:spcBef>
+              <a:spcAft>
+                <a:spcPts val="0"/>
+              </a:spcAft>
+              <a:buNone/>
+            </a:pPr>
+            <a:endParaRPr/>
+          </a:p>
+        </p:txBody>
+      </p:sp>
+      <p:sp>
+        <p:nvSpPr>
+          <p:cNvPr id="180" name="Google Shape;180;p23"/>
+          <p:cNvSpPr/>
+          <p:nvPr/>
+        </p:nvSpPr>
+        <p:spPr>
+          <a:xfrm>
+            <a:off x="448325" y="3133840"/>
+            <a:ext cx="125400" cy="125400"/>
+          </a:xfrm>
+          <a:prstGeom prst="ellipse">
+            <a:avLst/>
+          </a:prstGeom>
+          <a:solidFill>
+            <a:srgbClr val="6AA84F"/>
+          </a:solidFill>
+          <a:ln w="9525" cap="flat" cmpd="sng">
+            <a:solidFill>
+              <a:schemeClr val="dk2"/>
+            </a:solidFill>
+            <a:prstDash val="solid"/>
+            <a:round/>
+            <a:headEnd type="none" w="sm" len="sm"/>
+            <a:tailEnd type="none" w="sm" len="sm"/>
+          </a:ln>
+        </p:spPr>
+        <p:txBody>
+          <a:bodyPr spcFirstLastPara="1" wrap="square" lIns="91425" tIns="91425" rIns="91425" bIns="91425" anchor="ctr" anchorCtr="0">
+            <a:noAutofit/>
+          </a:bodyPr>
+          <a:lstStyle/>
+          <a:p>
+            <a:pPr marL="0" lvl="0" indent="0" algn="ctr" rtl="0">
+              <a:spcBef>
+                <a:spcPts val="0"/>
+              </a:spcBef>
+              <a:spcAft>
+                <a:spcPts val="0"/>
+              </a:spcAft>
+              <a:buNone/>
+            </a:pPr>
+            <a:endParaRPr/>
+          </a:p>
+        </p:txBody>
+      </p:sp>
+      <p:sp>
+        <p:nvSpPr>
+          <p:cNvPr id="181" name="Google Shape;181;p23"/>
+          <p:cNvSpPr/>
+          <p:nvPr/>
+        </p:nvSpPr>
+        <p:spPr>
+          <a:xfrm>
+            <a:off x="4967342" y="1797320"/>
+            <a:ext cx="125400" cy="125400"/>
+          </a:xfrm>
+          <a:prstGeom prst="ellipse">
+            <a:avLst/>
+          </a:prstGeom>
+          <a:solidFill>
+            <a:srgbClr val="6AA84F"/>
+          </a:solidFill>
+          <a:ln w="9525" cap="flat" cmpd="sng">
+            <a:solidFill>
+              <a:schemeClr val="dk2"/>
+            </a:solidFill>
+            <a:prstDash val="solid"/>
+            <a:round/>
+            <a:headEnd type="none" w="sm" len="sm"/>
+            <a:tailEnd type="none" w="sm" len="sm"/>
+          </a:ln>
+        </p:spPr>
+        <p:txBody>
+          <a:bodyPr spcFirstLastPara="1" wrap="square" lIns="91425" tIns="91425" rIns="91425" bIns="91425" anchor="ctr" anchorCtr="0">
+            <a:noAutofit/>
+          </a:bodyPr>
+          <a:lstStyle/>
+          <a:p>
+            <a:pPr marL="0" lvl="0" indent="0" algn="ctr" rtl="0">
+              <a:spcBef>
+                <a:spcPts val="0"/>
+              </a:spcBef>
+              <a:spcAft>
+                <a:spcPts val="0"/>
+              </a:spcAft>
+              <a:buNone/>
+            </a:pPr>
+            <a:endParaRPr/>
+          </a:p>
+        </p:txBody>
+      </p:sp>
+      <p:sp>
+        <p:nvSpPr>
+          <p:cNvPr id="182" name="Google Shape;182;p23"/>
+          <p:cNvSpPr/>
+          <p:nvPr/>
+        </p:nvSpPr>
+        <p:spPr>
+          <a:xfrm>
+            <a:off x="4967342" y="2788733"/>
+            <a:ext cx="125400" cy="125400"/>
+          </a:xfrm>
+          <a:prstGeom prst="ellipse">
+            <a:avLst/>
+          </a:prstGeom>
+          <a:solidFill>
+            <a:srgbClr val="6AA84F"/>
+          </a:solidFill>
+          <a:ln w="9525" cap="flat" cmpd="sng">
+            <a:solidFill>
+              <a:schemeClr val="dk2"/>
+            </a:solidFill>
+            <a:prstDash val="solid"/>
+            <a:round/>
+            <a:headEnd type="none" w="sm" len="sm"/>
+            <a:tailEnd type="none" w="sm" len="sm"/>
+          </a:ln>
+        </p:spPr>
+        <p:txBody>
+          <a:bodyPr spcFirstLastPara="1" wrap="square" lIns="91425" tIns="91425" rIns="91425" bIns="91425" anchor="ctr" anchorCtr="0">
+            <a:noAutofit/>
+          </a:bodyPr>
+          <a:lstStyle/>
+          <a:p>
+            <a:pPr marL="0" lvl="0" indent="0" algn="ctr" rtl="0">
+              <a:spcBef>
+                <a:spcPts val="0"/>
+              </a:spcBef>
+              <a:spcAft>
+                <a:spcPts val="0"/>
+              </a:spcAft>
+              <a:buNone/>
+            </a:pPr>
+            <a:endParaRPr/>
+          </a:p>
+        </p:txBody>
+      </p:sp>
+      <p:sp>
+        <p:nvSpPr>
+          <p:cNvPr id="183" name="Google Shape;183;p23"/>
+          <p:cNvSpPr/>
+          <p:nvPr/>
+        </p:nvSpPr>
+        <p:spPr>
+          <a:xfrm>
+            <a:off x="4967342" y="3290066"/>
+            <a:ext cx="125400" cy="125400"/>
+          </a:xfrm>
+          <a:prstGeom prst="ellipse">
+            <a:avLst/>
+          </a:prstGeom>
+          <a:solidFill>
+            <a:srgbClr val="6AA84F"/>
+          </a:solidFill>
+          <a:ln w="9525" cap="flat" cmpd="sng">
+            <a:solidFill>
+              <a:schemeClr val="dk2"/>
+            </a:solidFill>
+            <a:prstDash val="solid"/>
+            <a:round/>
+            <a:headEnd type="none" w="sm" len="sm"/>
+            <a:tailEnd type="none" w="sm" len="sm"/>
+          </a:ln>
+        </p:spPr>
+        <p:txBody>
+          <a:bodyPr spcFirstLastPara="1" wrap="square" lIns="91425" tIns="91425" rIns="91425" bIns="91425" anchor="ctr" anchorCtr="0">
+            <a:noAutofit/>
+          </a:bodyPr>
+          <a:lstStyle/>
+          <a:p>
+            <a:pPr marL="0" lvl="0" indent="0" algn="ctr" rtl="0">
+              <a:spcBef>
+                <a:spcPts val="0"/>
+              </a:spcBef>
+              <a:spcAft>
+                <a:spcPts val="0"/>
+              </a:spcAft>
+              <a:buNone/>
+            </a:pPr>
+            <a:endParaRPr/>
+          </a:p>
+        </p:txBody>
+      </p:sp>
+      <p:sp>
+        <p:nvSpPr>
+          <p:cNvPr id="184" name="Google Shape;184;p23"/>
+          <p:cNvSpPr/>
+          <p:nvPr/>
+        </p:nvSpPr>
+        <p:spPr>
+          <a:xfrm>
+            <a:off x="4967342" y="4540910"/>
+            <a:ext cx="125400" cy="125400"/>
+          </a:xfrm>
+          <a:prstGeom prst="ellipse">
+            <a:avLst/>
+          </a:prstGeom>
+          <a:solidFill>
+            <a:srgbClr val="6AA84F"/>
+          </a:solidFill>
+          <a:ln w="9525" cap="flat" cmpd="sng">
+            <a:solidFill>
+              <a:schemeClr val="dk2"/>
+            </a:solidFill>
+            <a:prstDash val="solid"/>
+            <a:round/>
+            <a:headEnd type="none" w="sm" len="sm"/>
+            <a:tailEnd type="none" w="sm" len="sm"/>
+          </a:ln>
+        </p:spPr>
+        <p:txBody>
+          <a:bodyPr spcFirstLastPara="1" wrap="square" lIns="91425" tIns="91425" rIns="91425" bIns="91425" anchor="ctr" anchorCtr="0">
+            <a:noAutofit/>
+          </a:bodyPr>
+          <a:lstStyle/>
+          <a:p>
+            <a:pPr marL="0" lvl="0" indent="0" algn="ctr" rtl="0">
+              <a:spcBef>
+                <a:spcPts val="0"/>
+              </a:spcBef>
+              <a:spcAft>
+                <a:spcPts val="0"/>
+              </a:spcAft>
+              <a:buNone/>
+            </a:pPr>
+            <a:endParaRPr/>
+          </a:p>
+        </p:txBody>
+      </p:sp>
+      <p:sp>
+        <p:nvSpPr>
+          <p:cNvPr id="185" name="Google Shape;185;p23"/>
+          <p:cNvSpPr txBox="1"/>
+          <p:nvPr/>
+        </p:nvSpPr>
+        <p:spPr>
+          <a:xfrm>
+            <a:off x="5439489" y="55350"/>
+            <a:ext cx="1761300" cy="526500"/>
+          </a:xfrm>
+          <a:prstGeom prst="rect">
+            <a:avLst/>
+          </a:prstGeom>
+          <a:noFill/>
+          <a:ln w="9525" cap="flat" cmpd="sng">
+            <a:solidFill>
+              <a:srgbClr val="FF0000"/>
+            </a:solidFill>
+            <a:prstDash val="solid"/>
+            <a:round/>
+            <a:headEnd type="none" w="sm" len="sm"/>
+            <a:tailEnd type="none" w="sm" len="sm"/>
+          </a:ln>
+        </p:spPr>
+        <p:txBody>
+          <a:bodyPr spcFirstLastPara="1" wrap="square" lIns="9125" tIns="9125" rIns="9125" bIns="9125" anchor="t" anchorCtr="0">
+            <a:spAutoFit/>
+          </a:bodyPr>
+          <a:lstStyle/>
+          <a:p>
+            <a:pPr marL="0" marR="0" lvl="0" indent="0" algn="l" rtl="0">
+              <a:lnSpc>
+                <a:spcPct val="100000"/>
+              </a:lnSpc>
+              <a:spcBef>
+                <a:spcPts val="0"/>
+              </a:spcBef>
+              <a:spcAft>
+                <a:spcPts val="0"/>
+              </a:spcAft>
+              <a:buClr>
+                <a:schemeClr val="dk1"/>
+              </a:buClr>
+              <a:buSzPts val="1100"/>
+              <a:buFont typeface="Arial"/>
+              <a:buNone/>
+            </a:pPr>
+            <a:r>
+              <a:rPr lang="en" sz="1100">
+                <a:solidFill>
+                  <a:srgbClr val="1F2937"/>
+                </a:solidFill>
+                <a:highlight>
+                  <a:srgbClr val="FFFFFF"/>
+                </a:highlight>
+                <a:latin typeface="Calibri"/>
+                <a:ea typeface="Calibri"/>
+                <a:cs typeface="Calibri"/>
+                <a:sym typeface="Calibri"/>
+              </a:rPr>
+              <a:t>Total #models: 121.    </a:t>
+            </a:r>
+            <a:endParaRPr sz="1100">
+              <a:solidFill>
+                <a:srgbClr val="1F2937"/>
+              </a:solidFill>
+              <a:highlight>
+                <a:srgbClr val="FFFFFF"/>
+              </a:highlight>
+              <a:latin typeface="Calibri"/>
+              <a:ea typeface="Calibri"/>
+              <a:cs typeface="Calibri"/>
+              <a:sym typeface="Calibri"/>
+            </a:endParaRPr>
+          </a:p>
+          <a:p>
+            <a:pPr marL="0" marR="0" lvl="0" indent="0" algn="l" rtl="0">
+              <a:lnSpc>
+                <a:spcPct val="100000"/>
+              </a:lnSpc>
+              <a:spcBef>
+                <a:spcPts val="0"/>
+              </a:spcBef>
+              <a:spcAft>
+                <a:spcPts val="0"/>
+              </a:spcAft>
+              <a:buClr>
+                <a:schemeClr val="dk1"/>
+              </a:buClr>
+              <a:buSzPts val="1100"/>
+              <a:buFont typeface="Arial"/>
+              <a:buNone/>
+            </a:pPr>
+            <a:r>
+              <a:rPr lang="en" sz="1100">
+                <a:solidFill>
+                  <a:srgbClr val="1F2937"/>
+                </a:solidFill>
+                <a:highlight>
+                  <a:srgbClr val="FFFFFF"/>
+                </a:highlight>
+                <a:latin typeface="Calibri"/>
+                <a:ea typeface="Calibri"/>
+                <a:cs typeface="Calibri"/>
+                <a:sym typeface="Calibri"/>
+              </a:rPr>
+              <a:t>Total #votes: 1,552,386.    </a:t>
+            </a:r>
+            <a:endParaRPr sz="1100">
+              <a:solidFill>
+                <a:srgbClr val="1F2937"/>
+              </a:solidFill>
+              <a:highlight>
+                <a:srgbClr val="FFFFFF"/>
+              </a:highlight>
+              <a:latin typeface="Calibri"/>
+              <a:ea typeface="Calibri"/>
+              <a:cs typeface="Calibri"/>
+              <a:sym typeface="Calibri"/>
+            </a:endParaRPr>
+          </a:p>
+          <a:p>
+            <a:pPr marL="0" marR="0" lvl="0" indent="0" algn="l" rtl="0">
+              <a:lnSpc>
+                <a:spcPct val="100000"/>
+              </a:lnSpc>
+              <a:spcBef>
+                <a:spcPts val="0"/>
+              </a:spcBef>
+              <a:spcAft>
+                <a:spcPts val="0"/>
+              </a:spcAft>
+              <a:buClr>
+                <a:schemeClr val="dk1"/>
+              </a:buClr>
+              <a:buSzPts val="1100"/>
+              <a:buFont typeface="Arial"/>
+              <a:buNone/>
+            </a:pPr>
+            <a:r>
+              <a:rPr lang="en" sz="1100">
+                <a:solidFill>
+                  <a:srgbClr val="1F2937"/>
+                </a:solidFill>
+                <a:highlight>
+                  <a:srgbClr val="FFFFFF"/>
+                </a:highlight>
+                <a:latin typeface="Calibri"/>
+                <a:ea typeface="Calibri"/>
+                <a:cs typeface="Calibri"/>
+                <a:sym typeface="Calibri"/>
+              </a:rPr>
+              <a:t>Last updated: 2024-07-29.</a:t>
+            </a:r>
+            <a:endParaRPr sz="1100" b="1">
+              <a:solidFill>
+                <a:srgbClr val="FF0000"/>
+              </a:solidFill>
+              <a:latin typeface="Calibri"/>
+              <a:ea typeface="Calibri"/>
+              <a:cs typeface="Calibri"/>
+              <a:sym typeface="Calibri"/>
+            </a:endParaRPr>
+          </a:p>
+        </p:txBody>
+      </p:sp>
+      <p:sp>
+        <p:nvSpPr>
+          <p:cNvPr id="186" name="Google Shape;186;p23"/>
+          <p:cNvSpPr/>
+          <p:nvPr/>
+        </p:nvSpPr>
+        <p:spPr>
+          <a:xfrm>
+            <a:off x="448325" y="4088834"/>
+            <a:ext cx="125400" cy="125400"/>
+          </a:xfrm>
+          <a:prstGeom prst="ellipse">
+            <a:avLst/>
+          </a:prstGeom>
+          <a:solidFill>
+            <a:srgbClr val="6AA84F"/>
+          </a:solidFill>
+          <a:ln w="9525" cap="flat" cmpd="sng">
+            <a:solidFill>
+              <a:schemeClr val="dk2"/>
+            </a:solidFill>
+            <a:prstDash val="solid"/>
+            <a:round/>
+            <a:headEnd type="none" w="sm" len="sm"/>
+            <a:tailEnd type="none" w="sm" len="sm"/>
+          </a:ln>
+        </p:spPr>
+        <p:txBody>
+          <a:bodyPr spcFirstLastPara="1" wrap="square" lIns="91425" tIns="91425" rIns="91425" bIns="91425" anchor="ctr" anchorCtr="0">
+            <a:noAutofit/>
+          </a:bodyPr>
+          <a:lstStyle/>
+          <a:p>
+            <a:pPr marL="0" lvl="0" indent="0" algn="ctr" rtl="0">
+              <a:spcBef>
+                <a:spcPts val="0"/>
+              </a:spcBef>
+              <a:spcAft>
+                <a:spcPts val="0"/>
+              </a:spcAft>
+              <a:buNone/>
+            </a:pPr>
+            <a:endParaRPr/>
+          </a:p>
+        </p:txBody>
+      </p:sp>
+      <p:sp>
+        <p:nvSpPr>
+          <p:cNvPr id="187" name="Google Shape;187;p23"/>
+          <p:cNvSpPr/>
+          <p:nvPr/>
+        </p:nvSpPr>
+        <p:spPr>
+          <a:xfrm>
+            <a:off x="4967342" y="2295267"/>
+            <a:ext cx="125400" cy="125400"/>
+          </a:xfrm>
+          <a:prstGeom prst="ellipse">
+            <a:avLst/>
+          </a:prstGeom>
+          <a:solidFill>
+            <a:srgbClr val="6AA84F"/>
+          </a:solidFill>
+          <a:ln w="9525" cap="flat" cmpd="sng">
+            <a:solidFill>
+              <a:schemeClr val="dk2"/>
+            </a:solidFill>
+            <a:prstDash val="solid"/>
+            <a:round/>
+            <a:headEnd type="none" w="sm" len="sm"/>
+            <a:tailEnd type="none" w="sm" len="sm"/>
+          </a:ln>
+        </p:spPr>
+        <p:txBody>
+          <a:bodyPr spcFirstLastPara="1" wrap="square" lIns="91425" tIns="91425" rIns="91425" bIns="91425" anchor="ctr" anchorCtr="0">
+            <a:noAutofit/>
+          </a:bodyPr>
+          <a:lstStyle/>
+          <a:p>
+            <a:pPr marL="0" lvl="0" indent="0" algn="ctr" rtl="0">
+              <a:spcBef>
+                <a:spcPts val="0"/>
+              </a:spcBef>
+              <a:spcAft>
+                <a:spcPts val="0"/>
+              </a:spcAft>
+              <a:buNone/>
+            </a:pPr>
+            <a:endParaRPr/>
+          </a:p>
+        </p:txBody>
+      </p:sp>
+      <p:sp>
+        <p:nvSpPr>
+          <p:cNvPr id="188" name="Google Shape;188;p23"/>
+          <p:cNvSpPr/>
+          <p:nvPr/>
+        </p:nvSpPr>
+        <p:spPr>
+          <a:xfrm>
+            <a:off x="4967342" y="4031692"/>
+            <a:ext cx="125400" cy="125400"/>
+          </a:xfrm>
+          <a:prstGeom prst="ellipse">
+            <a:avLst/>
+          </a:prstGeom>
+          <a:solidFill>
+            <a:srgbClr val="6AA84F"/>
+          </a:solidFill>
+          <a:ln w="9525" cap="flat" cmpd="sng">
+            <a:solidFill>
+              <a:schemeClr val="dk2"/>
+            </a:solidFill>
+            <a:prstDash val="solid"/>
+            <a:round/>
+            <a:headEnd type="none" w="sm" len="sm"/>
+            <a:tailEnd type="none" w="sm" len="sm"/>
+          </a:ln>
+        </p:spPr>
+        <p:txBody>
+          <a:bodyPr spcFirstLastPara="1" wrap="square" lIns="91425" tIns="91425" rIns="91425" bIns="91425" anchor="ctr" anchorCtr="0">
+            <a:noAutofit/>
+          </a:bodyPr>
+          <a:lstStyle/>
+          <a:p>
+            <a:pPr marL="0" lvl="0" indent="0" algn="ctr" rtl="0">
+              <a:spcBef>
+                <a:spcPts val="0"/>
+              </a:spcBef>
+              <a:spcAft>
+                <a:spcPts val="0"/>
+              </a:spcAft>
+              <a:buNone/>
+            </a:pPr>
+            <a:endParaRPr/>
+          </a:p>
+        </p:txBody>
+      </p:sp>
+      <p:pic>
+        <p:nvPicPr>
+          <p:cNvPr id="189" name="Google Shape;189;p23"/>
+          <p:cNvPicPr preferRelativeResize="0"/>
+          <p:nvPr/>
+        </p:nvPicPr>
+        <p:blipFill>
+          <a:blip r:embed="rId4" cstate="email">
+            <a:alphaModFix/>
+            <a:extLst>
+              <a:ext uri="{28A0092B-C50C-407E-A947-70E740481C1C}">
+                <a14:useLocalDpi xmlns:a14="http://schemas.microsoft.com/office/drawing/2010/main"/>
+              </a:ext>
+            </a:extLst>
+          </a:blip>
+          <a:stretch>
+            <a:fillRect/>
+          </a:stretch>
+        </p:blipFill>
+        <p:spPr>
+          <a:xfrm>
+            <a:off x="651675" y="799863"/>
+            <a:ext cx="3224654" cy="4191238"/>
+          </a:xfrm>
+          <a:prstGeom prst="rect">
+            <a:avLst/>
+          </a:prstGeom>
+          <a:noFill/>
+          <a:ln w="9525" cap="flat" cmpd="sng">
+            <a:solidFill>
+              <a:srgbClr val="FF0000"/>
+            </a:solidFill>
+            <a:prstDash val="solid"/>
+            <a:round/>
+            <a:headEnd type="none" w="sm" len="sm"/>
+            <a:tailEnd type="none" w="sm" len="sm"/>
+          </a:ln>
+        </p:spPr>
+      </p:pic>
+      <p:pic>
+        <p:nvPicPr>
+          <p:cNvPr id="190" name="Google Shape;190;p23"/>
+          <p:cNvPicPr preferRelativeResize="0"/>
+          <p:nvPr/>
+        </p:nvPicPr>
+        <p:blipFill>
+          <a:blip r:embed="rId5" cstate="email">
+            <a:alphaModFix/>
+            <a:extLst>
+              <a:ext uri="{28A0092B-C50C-407E-A947-70E740481C1C}">
+                <a14:useLocalDpi xmlns:a14="http://schemas.microsoft.com/office/drawing/2010/main"/>
+              </a:ext>
+            </a:extLst>
+          </a:blip>
+          <a:stretch>
+            <a:fillRect/>
+          </a:stretch>
+        </p:blipFill>
+        <p:spPr>
+          <a:xfrm>
+            <a:off x="5168942" y="734250"/>
+            <a:ext cx="3313666" cy="4256850"/>
+          </a:xfrm>
+          <a:prstGeom prst="rect">
+            <a:avLst/>
+          </a:prstGeom>
+          <a:noFill/>
+          <a:ln w="9525" cap="flat" cmpd="sng">
+            <a:solidFill>
+              <a:srgbClr val="FF0000"/>
+            </a:solidFill>
+            <a:prstDash val="solid"/>
+            <a:round/>
+            <a:headEnd type="none" w="sm" len="sm"/>
+            <a:tailEnd type="none" w="sm" len="sm"/>
+          </a:ln>
+        </p:spPr>
+      </p:pic>
+      <p:sp>
+        <p:nvSpPr>
+          <p:cNvPr id="191" name="Google Shape;191;p23"/>
+          <p:cNvSpPr/>
+          <p:nvPr/>
+        </p:nvSpPr>
+        <p:spPr>
+          <a:xfrm>
+            <a:off x="448334" y="1922755"/>
+            <a:ext cx="125400" cy="125400"/>
+          </a:xfrm>
+          <a:prstGeom prst="ellipse">
+            <a:avLst/>
+          </a:prstGeom>
+          <a:solidFill>
+            <a:srgbClr val="6AA84F"/>
+          </a:solidFill>
+          <a:ln w="9525" cap="flat" cmpd="sng">
+            <a:solidFill>
+              <a:schemeClr val="dk2"/>
+            </a:solidFill>
+            <a:prstDash val="solid"/>
+            <a:round/>
+            <a:headEnd type="none" w="sm" len="sm"/>
+            <a:tailEnd type="none" w="sm" len="sm"/>
+          </a:ln>
+        </p:spPr>
+        <p:txBody>
+          <a:bodyPr spcFirstLastPara="1" wrap="square" lIns="91425" tIns="91425" rIns="91425" bIns="91425" anchor="ctr" anchorCtr="0">
+            <a:noAutofit/>
+          </a:bodyPr>
+          <a:lstStyle/>
+          <a:p>
+            <a:pPr marL="0" lvl="0" indent="0" algn="ctr" rtl="0">
+              <a:spcBef>
+                <a:spcPts val="0"/>
+              </a:spcBef>
+              <a:spcAft>
+                <a:spcPts val="0"/>
+              </a:spcAft>
+              <a:buNone/>
+            </a:pPr>
+            <a:endParaRPr/>
+          </a:p>
+        </p:txBody>
+      </p:sp>
+      <p:sp>
+        <p:nvSpPr>
+          <p:cNvPr id="192" name="Google Shape;192;p23"/>
+          <p:cNvSpPr/>
+          <p:nvPr/>
+        </p:nvSpPr>
+        <p:spPr>
+          <a:xfrm>
+            <a:off x="168109" y="1883291"/>
+            <a:ext cx="213600" cy="203100"/>
+          </a:xfrm>
+          <a:prstGeom prst="star5">
+            <a:avLst>
+              <a:gd name="adj" fmla="val 19098"/>
+              <a:gd name="hf" fmla="val 105146"/>
+              <a:gd name="vf" fmla="val 110557"/>
+            </a:avLst>
+          </a:prstGeom>
+          <a:solidFill>
+            <a:srgbClr val="FF0000"/>
+          </a:solidFill>
+          <a:ln w="9525" cap="flat" cmpd="sng">
+            <a:solidFill>
+              <a:schemeClr val="dk2"/>
+            </a:solidFill>
+            <a:prstDash val="solid"/>
+            <a:round/>
+            <a:headEnd type="none" w="sm" len="sm"/>
+            <a:tailEnd type="none" w="sm" len="sm"/>
+          </a:ln>
+        </p:spPr>
+        <p:txBody>
+          <a:bodyPr spcFirstLastPara="1" wrap="square" lIns="91425" tIns="91425" rIns="91425" bIns="91425" anchor="ctr" anchorCtr="0">
+            <a:noAutofit/>
+          </a:bodyPr>
+          <a:lstStyle/>
+          <a:p>
+            <a:pPr marL="0" lvl="0" indent="0" algn="ctr" rtl="0">
+              <a:spcBef>
+                <a:spcPts val="0"/>
+              </a:spcBef>
+              <a:spcAft>
+                <a:spcPts val="0"/>
+              </a:spcAft>
+              <a:buNone/>
+            </a:pPr>
+            <a:endParaRPr/>
+          </a:p>
+        </p:txBody>
+      </p:sp>
+      <p:sp>
+        <p:nvSpPr>
+          <p:cNvPr id="193" name="Google Shape;193;p23"/>
+          <p:cNvSpPr/>
+          <p:nvPr/>
+        </p:nvSpPr>
+        <p:spPr>
+          <a:xfrm>
+            <a:off x="448325" y="4578691"/>
+            <a:ext cx="125400" cy="125400"/>
+          </a:xfrm>
+          <a:prstGeom prst="ellipse">
+            <a:avLst/>
+          </a:prstGeom>
+          <a:solidFill>
+            <a:srgbClr val="6AA84F"/>
+          </a:solidFill>
+          <a:ln w="9525" cap="flat" cmpd="sng">
+            <a:solidFill>
+              <a:schemeClr val="dk2"/>
+            </a:solidFill>
+            <a:prstDash val="solid"/>
+            <a:round/>
+            <a:headEnd type="none" w="sm" len="sm"/>
+            <a:tailEnd type="none" w="sm" len="sm"/>
+          </a:ln>
+        </p:spPr>
+        <p:txBody>
+          <a:bodyPr spcFirstLastPara="1" wrap="square" lIns="91425" tIns="91425" rIns="91425" bIns="91425" anchor="ctr" anchorCtr="0">
+            <a:noAutofit/>
+          </a:bodyPr>
+          <a:lstStyle/>
+          <a:p>
+            <a:pPr marL="0" lvl="0" indent="0" algn="ctr" rtl="0">
+              <a:spcBef>
+                <a:spcPts val="0"/>
+              </a:spcBef>
+              <a:spcAft>
+                <a:spcPts val="0"/>
+              </a:spcAft>
+              <a:buNone/>
+            </a:pPr>
+            <a:endParaRPr/>
+          </a:p>
+        </p:txBody>
+      </p:sp>
+      <p:sp>
+        <p:nvSpPr>
+          <p:cNvPr id="194" name="Google Shape;194;p23"/>
+          <p:cNvSpPr/>
+          <p:nvPr/>
+        </p:nvSpPr>
+        <p:spPr>
+          <a:xfrm>
+            <a:off x="4967342" y="4769510"/>
+            <a:ext cx="125400" cy="125400"/>
+          </a:xfrm>
+          <a:prstGeom prst="ellipse">
+            <a:avLst/>
+          </a:prstGeom>
+          <a:solidFill>
+            <a:srgbClr val="6AA84F"/>
+          </a:solidFill>
+          <a:ln w="9525" cap="flat" cmpd="sng">
+            <a:solidFill>
+              <a:schemeClr val="dk2"/>
+            </a:solidFill>
+            <a:prstDash val="solid"/>
+            <a:round/>
+            <a:headEnd type="none" w="sm" len="sm"/>
+            <a:tailEnd type="none" w="sm" len="sm"/>
+          </a:ln>
+        </p:spPr>
+        <p:txBody>
+          <a:bodyPr spcFirstLastPara="1" wrap="square" lIns="91425" tIns="91425" rIns="91425" bIns="91425" anchor="ctr" anchorCtr="0">
+            <a:noAutofit/>
+          </a:bodyPr>
+          <a:lstStyle/>
+          <a:p>
+            <a:pPr marL="0" lvl="0" indent="0" algn="ctr" rtl="0">
+              <a:spcBef>
+                <a:spcPts val="0"/>
+              </a:spcBef>
+              <a:spcAft>
+                <a:spcPts val="0"/>
+              </a:spcAft>
+              <a:buNone/>
+            </a:pPr>
+            <a:endParaRPr/>
+          </a:p>
+        </p:txBody>
+      </p:sp>
+      <p:sp>
+        <p:nvSpPr>
+          <p:cNvPr id="195" name="Google Shape;195;p23"/>
+          <p:cNvSpPr/>
+          <p:nvPr/>
+        </p:nvSpPr>
+        <p:spPr>
+          <a:xfrm>
+            <a:off x="4967342" y="2551425"/>
+            <a:ext cx="125400" cy="125400"/>
+          </a:xfrm>
+          <a:prstGeom prst="ellipse">
+            <a:avLst/>
+          </a:prstGeom>
+          <a:solidFill>
+            <a:srgbClr val="6AA84F"/>
+          </a:solidFill>
+          <a:ln w="9525" cap="flat" cmpd="sng">
+            <a:solidFill>
+              <a:schemeClr val="dk2"/>
+            </a:solidFill>
+            <a:prstDash val="solid"/>
+            <a:round/>
+            <a:headEnd type="none" w="sm" len="sm"/>
+            <a:tailEnd type="none" w="sm" len="sm"/>
+          </a:ln>
+        </p:spPr>
+        <p:txBody>
+          <a:bodyPr spcFirstLastPara="1" wrap="square" lIns="91425" tIns="91425" rIns="91425" bIns="91425" anchor="ctr" anchorCtr="0">
+            <a:noAutofit/>
+          </a:bodyPr>
+          <a:lstStyle/>
+          <a:p>
+            <a:pPr marL="0" lvl="0" indent="0" algn="ctr" rtl="0">
+              <a:spcBef>
+                <a:spcPts val="0"/>
+              </a:spcBef>
+              <a:spcAft>
+                <a:spcPts val="0"/>
+              </a:spcAft>
+              <a:buNone/>
+            </a:pPr>
+            <a:endParaRPr/>
+          </a:p>
+        </p:txBody>
+      </p:sp>
+    </p:spTree>
+  </p:cSld>
+  <p:clrMapOvr>
+    <a:masterClrMapping/>
+  </p:clrMapOvr>
+</p:sld>
+</file>
+
+<file path=ppt/slides/slide11.xml><?xml version="1.0" encoding="utf-8"?>
+<p:sld xmlns:a="http://schemas.openxmlformats.org/drawingml/2006/main" xmlns:r="http://schemas.openxmlformats.org/officeDocument/2006/relationships" xmlns:p="http://schemas.openxmlformats.org/presentationml/2006/main">
+  <p:cSld>
+    <p:spTree>
+      <p:nvGrpSpPr>
+        <p:cNvPr id="1" name="Shape 199"/>
         <p:cNvGrpSpPr/>
         <p:nvPr/>
       </p:nvGrpSpPr>
@@ -11723,7 +13481,7 @@
       </p:grpSpPr>
       <p:pic>
         <p:nvPicPr>
-          <p:cNvPr id="191" name="Google Shape;191;p23"/>
+          <p:cNvPr id="200" name="Google Shape;200;p24"/>
           <p:cNvPicPr preferRelativeResize="0"/>
           <p:nvPr/>
         </p:nvPicPr>
@@ -11756,7 +13514,7 @@
       </p:pic>
       <p:sp>
         <p:nvSpPr>
-          <p:cNvPr id="192" name="Google Shape;192;p23"/>
+          <p:cNvPr id="201" name="Google Shape;201;p24"/>
           <p:cNvSpPr/>
           <p:nvPr/>
         </p:nvSpPr>
@@ -11800,7 +13558,7 @@
       </p:sp>
       <p:sp>
         <p:nvSpPr>
-          <p:cNvPr id="193" name="Google Shape;193;p23"/>
+          <p:cNvPr id="202" name="Google Shape;202;p24"/>
           <p:cNvSpPr txBox="1"/>
           <p:nvPr/>
         </p:nvSpPr>
@@ -11890,7 +13648,7 @@
       </p:sp>
       <p:sp>
         <p:nvSpPr>
-          <p:cNvPr id="194" name="Google Shape;194;p23"/>
+          <p:cNvPr id="203" name="Google Shape;203;p24"/>
           <p:cNvSpPr txBox="1"/>
           <p:nvPr/>
         </p:nvSpPr>
@@ -11981,7 +13739,7 @@
       </p:sp>
       <p:sp>
         <p:nvSpPr>
-          <p:cNvPr id="195" name="Google Shape;195;p23"/>
+          <p:cNvPr id="204" name="Google Shape;204;p24"/>
           <p:cNvSpPr txBox="1"/>
           <p:nvPr/>
         </p:nvSpPr>
@@ -12337,7 +14095,7 @@
       </p:sp>
       <p:sp>
         <p:nvSpPr>
-          <p:cNvPr id="196" name="Google Shape;196;p23"/>
+          <p:cNvPr id="205" name="Google Shape;205;p24"/>
           <p:cNvSpPr/>
           <p:nvPr/>
         </p:nvSpPr>
@@ -12381,7 +14139,7 @@
       </p:sp>
       <p:sp>
         <p:nvSpPr>
-          <p:cNvPr id="197" name="Google Shape;197;p23"/>
+          <p:cNvPr id="206" name="Google Shape;206;p24"/>
           <p:cNvSpPr txBox="1"/>
           <p:nvPr/>
         </p:nvSpPr>
@@ -12486,12 +14244,12 @@
 </p:sld>
 </file>
 
-<file path=ppt/slides/slide11.xml><?xml version="1.0" encoding="utf-8"?>
+<file path=ppt/slides/slide12.xml><?xml version="1.0" encoding="utf-8"?>
 <p:sld xmlns:a="http://schemas.openxmlformats.org/drawingml/2006/main" xmlns:r="http://schemas.openxmlformats.org/officeDocument/2006/relationships" xmlns:p="http://schemas.openxmlformats.org/presentationml/2006/main">
   <p:cSld>
     <p:spTree>
       <p:nvGrpSpPr>
-        <p:cNvPr id="1" name="Shape 201"/>
+        <p:cNvPr id="1" name="Shape 210"/>
         <p:cNvGrpSpPr/>
         <p:nvPr/>
       </p:nvGrpSpPr>
@@ -12505,7 +14263,7 @@
       </p:grpSpPr>
       <p:pic>
         <p:nvPicPr>
-          <p:cNvPr id="202" name="Google Shape;202;p24"/>
+          <p:cNvPr id="211" name="Google Shape;211;p25"/>
           <p:cNvPicPr preferRelativeResize="0"/>
           <p:nvPr/>
         </p:nvPicPr>
@@ -12532,7 +14290,7 @@
       </p:pic>
       <p:sp>
         <p:nvSpPr>
-          <p:cNvPr id="203" name="Google Shape;203;p24"/>
+          <p:cNvPr id="212" name="Google Shape;212;p25"/>
           <p:cNvSpPr txBox="1"/>
           <p:nvPr/>
         </p:nvSpPr>
@@ -12598,7 +14356,7 @@
       </p:sp>
       <p:sp>
         <p:nvSpPr>
-          <p:cNvPr id="204" name="Google Shape;204;p24"/>
+          <p:cNvPr id="213" name="Google Shape;213;p25"/>
           <p:cNvSpPr txBox="1"/>
           <p:nvPr/>
         </p:nvSpPr>
@@ -13028,7 +14786,7 @@
       </p:sp>
       <p:pic>
         <p:nvPicPr>
-          <p:cNvPr id="205" name="Google Shape;205;p24"/>
+          <p:cNvPr id="214" name="Google Shape;214;p25"/>
           <p:cNvPicPr preferRelativeResize="0"/>
           <p:nvPr/>
         </p:nvPicPr>
@@ -13060,7 +14818,7 @@
       </p:pic>
       <p:sp>
         <p:nvSpPr>
-          <p:cNvPr id="206" name="Google Shape;206;p24"/>
+          <p:cNvPr id="215" name="Google Shape;215;p25"/>
           <p:cNvSpPr txBox="1"/>
           <p:nvPr/>
         </p:nvSpPr>
@@ -13139,7 +14897,7 @@
       </p:sp>
       <p:sp>
         <p:nvSpPr>
-          <p:cNvPr id="207" name="Google Shape;207;p24"/>
+          <p:cNvPr id="216" name="Google Shape;216;p25"/>
           <p:cNvSpPr txBox="1"/>
           <p:nvPr/>
         </p:nvSpPr>
@@ -13211,12 +14969,12 @@
 </p:sld>
 </file>
 
-<file path=ppt/slides/slide12.xml><?xml version="1.0" encoding="utf-8"?>
+<file path=ppt/slides/slide13.xml><?xml version="1.0" encoding="utf-8"?>
 <p:sld xmlns:a="http://schemas.openxmlformats.org/drawingml/2006/main" xmlns:r="http://schemas.openxmlformats.org/officeDocument/2006/relationships" xmlns:p="http://schemas.openxmlformats.org/presentationml/2006/main">
   <p:cSld>
     <p:spTree>
       <p:nvGrpSpPr>
-        <p:cNvPr id="1" name="Shape 211"/>
+        <p:cNvPr id="1" name="Shape 220"/>
         <p:cNvGrpSpPr/>
         <p:nvPr/>
       </p:nvGrpSpPr>
@@ -13230,7 +14988,7 @@
       </p:grpSpPr>
       <p:sp>
         <p:nvSpPr>
-          <p:cNvPr id="212" name="Google Shape;212;p25"/>
+          <p:cNvPr id="221" name="Google Shape;221;p26"/>
           <p:cNvSpPr txBox="1"/>
           <p:nvPr/>
         </p:nvSpPr>
@@ -18880,7 +20638,7 @@
               <a:buNone/>
             </a:pPr>
             <a:r>
-              <a:rPr lang="en" sz="1300" b="1" dirty="0">
+              <a:rPr lang="en" sz="1300" b="1">
                 <a:solidFill>
                   <a:srgbClr val="FF0000"/>
                 </a:solidFill>
@@ -18892,7 +20650,7 @@
               <a:t>Llama 3.1 405B model was quantized using EXL2</a:t>
             </a:r>
             <a:r>
-              <a:rPr lang="en" sz="1300" dirty="0">
+              <a:rPr lang="en" sz="1300">
                 <a:solidFill>
                   <a:schemeClr val="dk1"/>
                 </a:solidFill>
@@ -18903,7 +20661,7 @@
               </a:rPr>
               <a:t>.</a:t>
             </a:r>
-            <a:endParaRPr sz="1300" dirty="0">
+            <a:endParaRPr sz="1300">
               <a:solidFill>
                 <a:schemeClr val="dk1"/>
               </a:solidFill>
@@ -18926,7 +20684,7 @@
               <a:buChar char="●"/>
             </a:pPr>
             <a:r>
-              <a:rPr lang="en" sz="1300" dirty="0">
+              <a:rPr lang="en" sz="1300">
                 <a:solidFill>
                   <a:schemeClr val="dk1"/>
                 </a:solidFill>
@@ -18937,7 +20695,7 @@
               </a:rPr>
               <a:t> Result - 125-150GB model size range. </a:t>
             </a:r>
-            <a:endParaRPr sz="1300" dirty="0">
+            <a:endParaRPr sz="1300">
               <a:solidFill>
                 <a:schemeClr val="dk1"/>
               </a:solidFill>
@@ -18960,7 +20718,7 @@
               <a:buChar char="●"/>
             </a:pPr>
             <a:r>
-              <a:rPr lang="en" sz="1300" dirty="0">
+              <a:rPr lang="en" sz="1300">
                 <a:solidFill>
                   <a:schemeClr val="dk1"/>
                 </a:solidFill>
@@ -18971,7 +20729,7 @@
               </a:rPr>
               <a:t>Outperforms Meta's distillation to 70B. </a:t>
             </a:r>
-            <a:endParaRPr sz="1300" dirty="0">
+            <a:endParaRPr sz="1300">
               <a:solidFill>
                 <a:schemeClr val="dk1"/>
               </a:solidFill>
@@ -18994,7 +20752,7 @@
               <a:buChar char="●"/>
             </a:pPr>
             <a:r>
-              <a:rPr lang="en" sz="1300" dirty="0">
+              <a:rPr lang="en" sz="1300">
                 <a:solidFill>
                   <a:schemeClr val="dk1"/>
                 </a:solidFill>
@@ -19005,7 +20763,96 @@
               </a:rPr>
               <a:t>EXL2 - Mixed Quantization Levels within the same model</a:t>
             </a:r>
-            <a:endParaRPr sz="1300" dirty="0">
+            <a:endParaRPr sz="1300">
+              <a:solidFill>
+                <a:schemeClr val="dk1"/>
+              </a:solidFill>
+              <a:latin typeface="Calibri"/>
+              <a:ea typeface="Calibri"/>
+              <a:cs typeface="Calibri"/>
+              <a:sym typeface="Calibri"/>
+            </a:endParaRPr>
+          </a:p>
+        </p:txBody>
+      </p:sp>
+      <p:sp>
+        <p:nvSpPr>
+          <p:cNvPr id="135" name="Google Shape;135;p20"/>
+          <p:cNvSpPr txBox="1"/>
+          <p:nvPr/>
+        </p:nvSpPr>
+        <p:spPr>
+          <a:xfrm>
+            <a:off x="4628650" y="3502375"/>
+            <a:ext cx="4469700" cy="1218900"/>
+          </a:xfrm>
+          <a:prstGeom prst="rect">
+            <a:avLst/>
+          </a:prstGeom>
+          <a:solidFill>
+            <a:srgbClr val="FFF2CC"/>
+          </a:solidFill>
+          <a:ln w="9525" cap="flat" cmpd="sng">
+            <a:solidFill>
+              <a:srgbClr val="FF0000"/>
+            </a:solidFill>
+            <a:prstDash val="solid"/>
+            <a:round/>
+            <a:headEnd type="none" w="sm" len="sm"/>
+            <a:tailEnd type="none" w="sm" len="sm"/>
+          </a:ln>
+        </p:spPr>
+        <p:txBody>
+          <a:bodyPr spcFirstLastPara="1" wrap="square" lIns="9125" tIns="9125" rIns="9125" bIns="9125" anchor="t" anchorCtr="0">
+            <a:spAutoFit/>
+          </a:bodyPr>
+          <a:lstStyle/>
+          <a:p>
+            <a:pPr marL="0" lvl="0" indent="0" algn="l" rtl="0">
+              <a:spcBef>
+                <a:spcPts val="0"/>
+              </a:spcBef>
+              <a:spcAft>
+                <a:spcPts val="0"/>
+              </a:spcAft>
+              <a:buNone/>
+            </a:pPr>
+            <a:r>
+              <a:rPr lang="en" sz="1300" b="1">
+                <a:solidFill>
+                  <a:srgbClr val="FF0000"/>
+                </a:solidFill>
+                <a:latin typeface="Calibri"/>
+                <a:ea typeface="Calibri"/>
+                <a:cs typeface="Calibri"/>
+                <a:sym typeface="Calibri"/>
+              </a:rPr>
+              <a:t>Mark Zuckerberg "Inflection Point" post:</a:t>
+            </a:r>
+            <a:br>
+              <a:rPr lang="en" sz="1300" b="1">
+                <a:solidFill>
+                  <a:schemeClr val="dk1"/>
+                </a:solidFill>
+                <a:latin typeface="Calibri"/>
+                <a:ea typeface="Calibri"/>
+                <a:cs typeface="Calibri"/>
+                <a:sym typeface="Calibri"/>
+              </a:rPr>
+            </a:br>
+            <a:r>
+              <a:rPr lang="en" sz="1300">
+                <a:solidFill>
+                  <a:schemeClr val="dk1"/>
+                </a:solidFill>
+                <a:latin typeface="Calibri"/>
+                <a:ea typeface="Calibri"/>
+                <a:cs typeface="Calibri"/>
+                <a:sym typeface="Calibri"/>
+              </a:rPr>
+              <a:t>"I believe the Llama 3.1 release will be an inflection point in the industry where most developers begin to primarily use open source, and I expect that approach to only grow from here. I hope you’ll join us on this journey to bring the benefits of AI to everyone in the world."</a:t>
+            </a:r>
+            <a:endParaRPr sz="1300">
               <a:solidFill>
                 <a:schemeClr val="dk1"/>
               </a:solidFill>
@@ -19030,7 +20877,7 @@
   <p:cSld>
     <p:spTree>
       <p:nvGrpSpPr>
-        <p:cNvPr id="1" name="Shape 138"/>
+        <p:cNvPr id="1" name="Shape 139"/>
         <p:cNvGrpSpPr/>
         <p:nvPr/>
       </p:nvGrpSpPr>
@@ -19044,7 +20891,474 @@
       </p:grpSpPr>
       <p:sp>
         <p:nvSpPr>
-          <p:cNvPr id="139" name="Google Shape;139;p21"/>
+          <p:cNvPr id="140" name="Google Shape;140;p21"/>
+          <p:cNvSpPr txBox="1"/>
+          <p:nvPr/>
+        </p:nvSpPr>
+        <p:spPr>
+          <a:xfrm>
+            <a:off x="76200" y="65050"/>
+            <a:ext cx="936600" cy="326400"/>
+          </a:xfrm>
+          <a:prstGeom prst="rect">
+            <a:avLst/>
+          </a:prstGeom>
+          <a:noFill/>
+          <a:ln>
+            <a:noFill/>
+          </a:ln>
+        </p:spPr>
+        <p:txBody>
+          <a:bodyPr spcFirstLastPara="1" wrap="square" lIns="9125" tIns="9125" rIns="9125" bIns="9125" anchor="t" anchorCtr="0">
+            <a:spAutoFit/>
+          </a:bodyPr>
+          <a:lstStyle/>
+          <a:p>
+            <a:pPr marL="0" lvl="0" indent="0" algn="l" rtl="0">
+              <a:spcBef>
+                <a:spcPts val="0"/>
+              </a:spcBef>
+              <a:spcAft>
+                <a:spcPts val="0"/>
+              </a:spcAft>
+              <a:buClr>
+                <a:schemeClr val="dk1"/>
+              </a:buClr>
+              <a:buSzPts val="1100"/>
+              <a:buFont typeface="Arial"/>
+              <a:buNone/>
+            </a:pPr>
+            <a:r>
+              <a:rPr lang="en" sz="2000" b="1">
+                <a:solidFill>
+                  <a:schemeClr val="dk1"/>
+                </a:solidFill>
+                <a:latin typeface="Calibri"/>
+                <a:ea typeface="Calibri"/>
+                <a:cs typeface="Calibri"/>
+                <a:sym typeface="Calibri"/>
+              </a:rPr>
+              <a:t>Misc 7</a:t>
+            </a:r>
+            <a:endParaRPr sz="2000" b="1">
+              <a:solidFill>
+                <a:schemeClr val="dk1"/>
+              </a:solidFill>
+              <a:latin typeface="Calibri"/>
+              <a:ea typeface="Calibri"/>
+              <a:cs typeface="Calibri"/>
+              <a:sym typeface="Calibri"/>
+            </a:endParaRPr>
+          </a:p>
+        </p:txBody>
+      </p:sp>
+      <p:sp>
+        <p:nvSpPr>
+          <p:cNvPr id="141" name="Google Shape;141;p21"/>
+          <p:cNvSpPr txBox="1"/>
+          <p:nvPr/>
+        </p:nvSpPr>
+        <p:spPr>
+          <a:xfrm>
+            <a:off x="76200" y="469825"/>
+            <a:ext cx="4469700" cy="880500"/>
+          </a:xfrm>
+          <a:prstGeom prst="rect">
+            <a:avLst/>
+          </a:prstGeom>
+          <a:solidFill>
+            <a:srgbClr val="FFF2CC"/>
+          </a:solidFill>
+          <a:ln w="9525" cap="flat" cmpd="sng">
+            <a:solidFill>
+              <a:srgbClr val="FF0000"/>
+            </a:solidFill>
+            <a:prstDash val="solid"/>
+            <a:round/>
+            <a:headEnd type="none" w="sm" len="sm"/>
+            <a:tailEnd type="none" w="sm" len="sm"/>
+          </a:ln>
+        </p:spPr>
+        <p:txBody>
+          <a:bodyPr spcFirstLastPara="1" wrap="square" lIns="9125" tIns="9125" rIns="9125" bIns="9125" anchor="t" anchorCtr="0">
+            <a:spAutoFit/>
+          </a:bodyPr>
+          <a:lstStyle/>
+          <a:p>
+            <a:pPr marL="0" lvl="0" indent="0" algn="l" rtl="0">
+              <a:spcBef>
+                <a:spcPts val="0"/>
+              </a:spcBef>
+              <a:spcAft>
+                <a:spcPts val="0"/>
+              </a:spcAft>
+              <a:buNone/>
+            </a:pPr>
+            <a:r>
+              <a:rPr lang="en" sz="1300" b="1">
+                <a:solidFill>
+                  <a:srgbClr val="FF0000"/>
+                </a:solidFill>
+                <a:latin typeface="Calibri"/>
+                <a:ea typeface="Calibri"/>
+                <a:cs typeface="Calibri"/>
+                <a:sym typeface="Calibri"/>
+              </a:rPr>
+              <a:t>Microsoft:  </a:t>
+            </a:r>
+            <a:r>
+              <a:rPr lang="en" sz="1300" b="1">
+                <a:solidFill>
+                  <a:srgbClr val="3C78D8"/>
+                </a:solidFill>
+                <a:latin typeface="Calibri"/>
+                <a:ea typeface="Calibri"/>
+                <a:cs typeface="Calibri"/>
+                <a:sym typeface="Calibri"/>
+              </a:rPr>
+              <a:t>Local Free Multi-Agent RAG </a:t>
+            </a:r>
+            <a:endParaRPr sz="1300">
+              <a:solidFill>
+                <a:schemeClr val="dk1"/>
+              </a:solidFill>
+              <a:latin typeface="Calibri"/>
+              <a:ea typeface="Calibri"/>
+              <a:cs typeface="Calibri"/>
+              <a:sym typeface="Calibri"/>
+            </a:endParaRPr>
+          </a:p>
+          <a:p>
+            <a:pPr marL="0" lvl="0" indent="0" algn="l" rtl="0">
+              <a:spcBef>
+                <a:spcPts val="0"/>
+              </a:spcBef>
+              <a:spcAft>
+                <a:spcPts val="0"/>
+              </a:spcAft>
+              <a:buNone/>
+            </a:pPr>
+            <a:endParaRPr sz="600">
+              <a:solidFill>
+                <a:schemeClr val="dk1"/>
+              </a:solidFill>
+              <a:latin typeface="Calibri"/>
+              <a:ea typeface="Calibri"/>
+              <a:cs typeface="Calibri"/>
+              <a:sym typeface="Calibri"/>
+            </a:endParaRPr>
+          </a:p>
+          <a:p>
+            <a:pPr marL="0" lvl="0" indent="0" algn="l" rtl="0">
+              <a:spcBef>
+                <a:spcPts val="0"/>
+              </a:spcBef>
+              <a:spcAft>
+                <a:spcPts val="0"/>
+              </a:spcAft>
+              <a:buNone/>
+            </a:pPr>
+            <a:r>
+              <a:rPr lang="en" sz="1300" b="1">
+                <a:solidFill>
+                  <a:srgbClr val="FF0000"/>
+                </a:solidFill>
+                <a:latin typeface="Calibri"/>
+                <a:ea typeface="Calibri"/>
+                <a:cs typeface="Calibri"/>
+                <a:sym typeface="Calibri"/>
+              </a:rPr>
+              <a:t>     GraphRAG  +  AutoGen  +  Ollama  +  Chainlit </a:t>
+            </a:r>
+            <a:endParaRPr sz="1300" b="1">
+              <a:solidFill>
+                <a:srgbClr val="FF0000"/>
+              </a:solidFill>
+              <a:latin typeface="Calibri"/>
+              <a:ea typeface="Calibri"/>
+              <a:cs typeface="Calibri"/>
+              <a:sym typeface="Calibri"/>
+            </a:endParaRPr>
+          </a:p>
+          <a:p>
+            <a:pPr marL="0" lvl="0" indent="0" algn="l" rtl="0">
+              <a:spcBef>
+                <a:spcPts val="0"/>
+              </a:spcBef>
+              <a:spcAft>
+                <a:spcPts val="0"/>
+              </a:spcAft>
+              <a:buNone/>
+            </a:pPr>
+            <a:r>
+              <a:rPr lang="en" sz="600" b="1">
+                <a:solidFill>
+                  <a:srgbClr val="3C78D8"/>
+                </a:solidFill>
+                <a:latin typeface="Calibri"/>
+                <a:ea typeface="Calibri"/>
+                <a:cs typeface="Calibri"/>
+                <a:sym typeface="Calibri"/>
+              </a:rPr>
+              <a:t>  </a:t>
+            </a:r>
+            <a:r>
+              <a:rPr lang="en" sz="900" u="sng">
+                <a:solidFill>
+                  <a:schemeClr val="hlink"/>
+                </a:solidFill>
+                <a:latin typeface="Calibri"/>
+                <a:ea typeface="Calibri"/>
+                <a:cs typeface="Calibri"/>
+                <a:sym typeface="Calibri"/>
+                <a:hlinkClick r:id="rId3"/>
+              </a:rPr>
+              <a:t>https://ai.gopubby.com/microsofts-graphrag-autogen-ollama-chainlit-fully-local-free-multi-agent-rag-superbot-61ad3759f06f</a:t>
+            </a:r>
+            <a:r>
+              <a:rPr lang="en" sz="900">
+                <a:solidFill>
+                  <a:schemeClr val="dk1"/>
+                </a:solidFill>
+                <a:latin typeface="Calibri"/>
+                <a:ea typeface="Calibri"/>
+                <a:cs typeface="Calibri"/>
+                <a:sym typeface="Calibri"/>
+              </a:rPr>
+              <a:t> </a:t>
+            </a:r>
+            <a:endParaRPr sz="600">
+              <a:solidFill>
+                <a:schemeClr val="dk1"/>
+              </a:solidFill>
+              <a:latin typeface="Calibri"/>
+              <a:ea typeface="Calibri"/>
+              <a:cs typeface="Calibri"/>
+              <a:sym typeface="Calibri"/>
+            </a:endParaRPr>
+          </a:p>
+        </p:txBody>
+      </p:sp>
+      <p:pic>
+        <p:nvPicPr>
+          <p:cNvPr id="142" name="Google Shape;142;p21"/>
+          <p:cNvPicPr preferRelativeResize="0"/>
+          <p:nvPr/>
+        </p:nvPicPr>
+        <p:blipFill>
+          <a:blip r:embed="rId4" cstate="email">
+            <a:alphaModFix/>
+            <a:extLst>
+              <a:ext uri="{28A0092B-C50C-407E-A947-70E740481C1C}">
+                <a14:useLocalDpi xmlns:a14="http://schemas.microsoft.com/office/drawing/2010/main"/>
+              </a:ext>
+            </a:extLst>
+          </a:blip>
+          <a:stretch>
+            <a:fillRect/>
+          </a:stretch>
+        </p:blipFill>
+        <p:spPr>
+          <a:xfrm>
+            <a:off x="4698300" y="152400"/>
+            <a:ext cx="4293299" cy="3265974"/>
+          </a:xfrm>
+          <a:prstGeom prst="rect">
+            <a:avLst/>
+          </a:prstGeom>
+          <a:noFill/>
+          <a:ln w="9525" cap="flat" cmpd="sng">
+            <a:solidFill>
+              <a:srgbClr val="FF0000"/>
+            </a:solidFill>
+            <a:prstDash val="solid"/>
+            <a:round/>
+            <a:headEnd type="none" w="sm" len="sm"/>
+            <a:tailEnd type="none" w="sm" len="sm"/>
+          </a:ln>
+        </p:spPr>
+      </p:pic>
+      <p:sp>
+        <p:nvSpPr>
+          <p:cNvPr id="143" name="Google Shape;143;p21"/>
+          <p:cNvSpPr txBox="1"/>
+          <p:nvPr/>
+        </p:nvSpPr>
+        <p:spPr>
+          <a:xfrm>
+            <a:off x="76200" y="1447675"/>
+            <a:ext cx="4469700" cy="1296000"/>
+          </a:xfrm>
+          <a:prstGeom prst="rect">
+            <a:avLst/>
+          </a:prstGeom>
+          <a:solidFill>
+            <a:srgbClr val="FFF2CC"/>
+          </a:solidFill>
+          <a:ln w="9525" cap="flat" cmpd="sng">
+            <a:solidFill>
+              <a:srgbClr val="FF0000"/>
+            </a:solidFill>
+            <a:prstDash val="solid"/>
+            <a:round/>
+            <a:headEnd type="none" w="sm" len="sm"/>
+            <a:tailEnd type="none" w="sm" len="sm"/>
+          </a:ln>
+        </p:spPr>
+        <p:txBody>
+          <a:bodyPr spcFirstLastPara="1" wrap="square" lIns="9125" tIns="9125" rIns="9125" bIns="9125" anchor="t" anchorCtr="0">
+            <a:spAutoFit/>
+          </a:bodyPr>
+          <a:lstStyle/>
+          <a:p>
+            <a:pPr marL="0" lvl="0" indent="0" algn="l" rtl="0">
+              <a:spcBef>
+                <a:spcPts val="0"/>
+              </a:spcBef>
+              <a:spcAft>
+                <a:spcPts val="0"/>
+              </a:spcAft>
+              <a:buClr>
+                <a:schemeClr val="dk1"/>
+              </a:buClr>
+              <a:buSzPts val="1100"/>
+              <a:buFont typeface="Arial"/>
+              <a:buNone/>
+            </a:pPr>
+            <a:r>
+              <a:rPr lang="en" sz="1300" b="1">
+                <a:solidFill>
+                  <a:srgbClr val="FF0000"/>
+                </a:solidFill>
+                <a:latin typeface="Calibri"/>
+                <a:ea typeface="Calibri"/>
+                <a:cs typeface="Calibri"/>
+                <a:sym typeface="Calibri"/>
+              </a:rPr>
+              <a:t>OpenAI Talking ChatGPT Bot</a:t>
+            </a:r>
+            <a:endParaRPr sz="1300">
+              <a:solidFill>
+                <a:schemeClr val="dk1"/>
+              </a:solidFill>
+              <a:latin typeface="Calibri"/>
+              <a:ea typeface="Calibri"/>
+              <a:cs typeface="Calibri"/>
+              <a:sym typeface="Calibri"/>
+            </a:endParaRPr>
+          </a:p>
+          <a:p>
+            <a:pPr marL="0" lvl="0" indent="0" algn="l" rtl="0">
+              <a:spcBef>
+                <a:spcPts val="0"/>
+              </a:spcBef>
+              <a:spcAft>
+                <a:spcPts val="0"/>
+              </a:spcAft>
+              <a:buClr>
+                <a:schemeClr val="dk1"/>
+              </a:buClr>
+              <a:buSzPts val="1100"/>
+              <a:buFont typeface="Arial"/>
+              <a:buNone/>
+            </a:pPr>
+            <a:r>
+              <a:rPr lang="en" sz="1300">
+                <a:solidFill>
+                  <a:schemeClr val="dk1"/>
+                </a:solidFill>
+                <a:latin typeface="Calibri"/>
+                <a:ea typeface="Calibri"/>
+                <a:cs typeface="Calibri"/>
+                <a:sym typeface="Calibri"/>
+              </a:rPr>
+              <a:t>OpenAI is launching a new AI voice chatbot powered by the GPT-4o model with features that include natural, fluent conversation capabilities. It is initially available to select ChatGPT Plus subscribers. </a:t>
+            </a:r>
+            <a:endParaRPr sz="1300">
+              <a:solidFill>
+                <a:schemeClr val="dk1"/>
+              </a:solidFill>
+              <a:latin typeface="Calibri"/>
+              <a:ea typeface="Calibri"/>
+              <a:cs typeface="Calibri"/>
+              <a:sym typeface="Calibri"/>
+            </a:endParaRPr>
+          </a:p>
+          <a:p>
+            <a:pPr marL="0" lvl="0" indent="0" algn="l" rtl="0">
+              <a:spcBef>
+                <a:spcPts val="0"/>
+              </a:spcBef>
+              <a:spcAft>
+                <a:spcPts val="0"/>
+              </a:spcAft>
+              <a:buNone/>
+            </a:pPr>
+            <a:r>
+              <a:rPr lang="en" sz="900" u="sng">
+                <a:solidFill>
+                  <a:schemeClr val="hlink"/>
+                </a:solidFill>
+                <a:latin typeface="Calibri"/>
+                <a:ea typeface="Calibri"/>
+                <a:cs typeface="Calibri"/>
+                <a:sym typeface="Calibri"/>
+                <a:hlinkClick r:id="rId5"/>
+              </a:rPr>
+              <a:t>https://www.technologyreview.com/2024/07/30/1095489/openai-has-released-a-new-chatgpt-bot-that-you-can-talk-to/</a:t>
+            </a:r>
+            <a:r>
+              <a:rPr lang="en" sz="900">
+                <a:solidFill>
+                  <a:schemeClr val="dk1"/>
+                </a:solidFill>
+                <a:latin typeface="Calibri"/>
+                <a:ea typeface="Calibri"/>
+                <a:cs typeface="Calibri"/>
+                <a:sym typeface="Calibri"/>
+              </a:rPr>
+              <a:t> </a:t>
+            </a:r>
+            <a:endParaRPr sz="900">
+              <a:solidFill>
+                <a:schemeClr val="dk1"/>
+              </a:solidFill>
+              <a:latin typeface="Calibri"/>
+              <a:ea typeface="Calibri"/>
+              <a:cs typeface="Calibri"/>
+              <a:sym typeface="Calibri"/>
+            </a:endParaRPr>
+          </a:p>
+        </p:txBody>
+      </p:sp>
+    </p:spTree>
+  </p:cSld>
+  <p:clrMapOvr>
+    <a:masterClrMapping/>
+  </p:clrMapOvr>
+</p:sld>
+</file>
+
+<file path=ppt/slides/slide9.xml><?xml version="1.0" encoding="utf-8"?>
+<p:sld xmlns:a="http://schemas.openxmlformats.org/drawingml/2006/main" xmlns:r="http://schemas.openxmlformats.org/officeDocument/2006/relationships" xmlns:p="http://schemas.openxmlformats.org/presentationml/2006/main">
+  <p:cSld>
+    <p:spTree>
+      <p:nvGrpSpPr>
+        <p:cNvPr id="1" name="Shape 147"/>
+        <p:cNvGrpSpPr/>
+        <p:nvPr/>
+      </p:nvGrpSpPr>
+      <p:grpSpPr>
+        <a:xfrm>
+          <a:off x="0" y="0"/>
+          <a:ext cx="0" cy="0"/>
+          <a:chOff x="0" y="0"/>
+          <a:chExt cx="0" cy="0"/>
+        </a:xfrm>
+      </p:grpSpPr>
+      <p:sp>
+        <p:nvSpPr>
+          <p:cNvPr id="148" name="Google Shape;148;p22"/>
           <p:cNvSpPr txBox="1"/>
           <p:nvPr/>
         </p:nvSpPr>
@@ -19205,7 +21519,7 @@
       </p:sp>
       <p:sp>
         <p:nvSpPr>
-          <p:cNvPr id="140" name="Google Shape;140;p21"/>
+          <p:cNvPr id="149" name="Google Shape;149;p22"/>
           <p:cNvSpPr txBox="1"/>
           <p:nvPr/>
         </p:nvSpPr>
@@ -19319,7 +21633,7 @@
       </p:sp>
       <p:sp>
         <p:nvSpPr>
-          <p:cNvPr id="141" name="Google Shape;141;p21"/>
+          <p:cNvPr id="150" name="Google Shape;150;p22"/>
           <p:cNvSpPr txBox="1"/>
           <p:nvPr/>
         </p:nvSpPr>
@@ -19385,7 +21699,7 @@
       </p:sp>
       <p:sp>
         <p:nvSpPr>
-          <p:cNvPr id="142" name="Google Shape;142;p21"/>
+          <p:cNvPr id="151" name="Google Shape;151;p22"/>
           <p:cNvSpPr txBox="1"/>
           <p:nvPr/>
         </p:nvSpPr>
@@ -19476,7 +21790,7 @@
       </p:sp>
       <p:sp>
         <p:nvSpPr>
-          <p:cNvPr id="143" name="Google Shape;143;p21"/>
+          <p:cNvPr id="152" name="Google Shape;152;p22"/>
           <p:cNvSpPr txBox="1"/>
           <p:nvPr/>
         </p:nvSpPr>
@@ -19550,7 +21864,7 @@
       </p:sp>
       <p:sp>
         <p:nvSpPr>
-          <p:cNvPr id="144" name="Google Shape;144;p21"/>
+          <p:cNvPr id="153" name="Google Shape;153;p22"/>
           <p:cNvSpPr/>
           <p:nvPr/>
         </p:nvSpPr>
@@ -19596,7 +21910,7 @@
       </p:sp>
       <p:sp>
         <p:nvSpPr>
-          <p:cNvPr id="145" name="Google Shape;145;p21"/>
+          <p:cNvPr id="154" name="Google Shape;154;p22"/>
           <p:cNvSpPr/>
           <p:nvPr/>
         </p:nvSpPr>
@@ -19642,7 +21956,7 @@
       </p:sp>
       <p:sp>
         <p:nvSpPr>
-          <p:cNvPr id="146" name="Google Shape;146;p21"/>
+          <p:cNvPr id="155" name="Google Shape;155;p22"/>
           <p:cNvSpPr/>
           <p:nvPr/>
         </p:nvSpPr>
@@ -19688,7 +22002,7 @@
       </p:sp>
       <p:sp>
         <p:nvSpPr>
-          <p:cNvPr id="147" name="Google Shape;147;p21"/>
+          <p:cNvPr id="156" name="Google Shape;156;p22"/>
           <p:cNvSpPr/>
           <p:nvPr/>
         </p:nvSpPr>
@@ -19734,7 +22048,7 @@
       </p:sp>
       <p:sp>
         <p:nvSpPr>
-          <p:cNvPr id="148" name="Google Shape;148;p21"/>
+          <p:cNvPr id="157" name="Google Shape;157;p22"/>
           <p:cNvSpPr/>
           <p:nvPr/>
         </p:nvSpPr>
@@ -19780,7 +22094,7 @@
       </p:sp>
       <p:sp>
         <p:nvSpPr>
-          <p:cNvPr id="149" name="Google Shape;149;p21"/>
+          <p:cNvPr id="158" name="Google Shape;158;p22"/>
           <p:cNvSpPr/>
           <p:nvPr/>
         </p:nvSpPr>
@@ -19826,7 +22140,7 @@
       </p:sp>
       <p:sp>
         <p:nvSpPr>
-          <p:cNvPr id="150" name="Google Shape;150;p21"/>
+          <p:cNvPr id="159" name="Google Shape;159;p22"/>
           <p:cNvSpPr/>
           <p:nvPr/>
         </p:nvSpPr>
@@ -19872,7 +22186,7 @@
       </p:sp>
       <p:sp>
         <p:nvSpPr>
-          <p:cNvPr id="151" name="Google Shape;151;p21"/>
+          <p:cNvPr id="160" name="Google Shape;160;p22"/>
           <p:cNvSpPr/>
           <p:nvPr/>
         </p:nvSpPr>
@@ -19918,7 +22232,7 @@
       </p:sp>
       <p:sp>
         <p:nvSpPr>
-          <p:cNvPr id="152" name="Google Shape;152;p21"/>
+          <p:cNvPr id="161" name="Google Shape;161;p22"/>
           <p:cNvSpPr/>
           <p:nvPr/>
         </p:nvSpPr>
@@ -19964,7 +22278,7 @@
       </p:sp>
       <p:sp>
         <p:nvSpPr>
-          <p:cNvPr id="153" name="Google Shape;153;p21"/>
+          <p:cNvPr id="162" name="Google Shape;162;p22"/>
           <p:cNvSpPr/>
           <p:nvPr/>
         </p:nvSpPr>
@@ -20010,7 +22324,7 @@
       </p:sp>
       <p:sp>
         <p:nvSpPr>
-          <p:cNvPr id="154" name="Google Shape;154;p21"/>
+          <p:cNvPr id="163" name="Google Shape;163;p22"/>
           <p:cNvSpPr/>
           <p:nvPr/>
         </p:nvSpPr>
@@ -20056,7 +22370,7 @@
       </p:sp>
       <p:pic>
         <p:nvPicPr>
-          <p:cNvPr id="155" name="Google Shape;155;p21"/>
+          <p:cNvPr id="164" name="Google Shape;164;p22"/>
           <p:cNvPicPr preferRelativeResize="0"/>
           <p:nvPr/>
         </p:nvPicPr>
@@ -20095,7 +22409,7 @@
       </p:pic>
       <p:pic>
         <p:nvPicPr>
-          <p:cNvPr id="156" name="Google Shape;156;p21"/>
+          <p:cNvPr id="165" name="Google Shape;165;p22"/>
           <p:cNvPicPr preferRelativeResize="0"/>
           <p:nvPr/>
         </p:nvPicPr>
@@ -20134,7 +22448,7 @@
       </p:pic>
       <p:sp>
         <p:nvSpPr>
-          <p:cNvPr id="157" name="Google Shape;157;p21"/>
+          <p:cNvPr id="166" name="Google Shape;166;p22"/>
           <p:cNvSpPr/>
           <p:nvPr/>
         </p:nvSpPr>
@@ -20180,7 +22494,7 @@
       </p:sp>
       <p:sp>
         <p:nvSpPr>
-          <p:cNvPr id="158" name="Google Shape;158;p21"/>
+          <p:cNvPr id="167" name="Google Shape;167;p22"/>
           <p:cNvSpPr/>
           <p:nvPr/>
         </p:nvSpPr>
@@ -20230,7 +22544,7 @@
       </p:sp>
       <p:sp>
         <p:nvSpPr>
-          <p:cNvPr id="159" name="Google Shape;159;p21"/>
+          <p:cNvPr id="168" name="Google Shape;168;p22"/>
           <p:cNvSpPr/>
           <p:nvPr/>
         </p:nvSpPr>
@@ -20248,1476 +22562,6 @@
           </a:prstGeom>
           <a:solidFill>
             <a:srgbClr val="FF0000"/>
-          </a:solidFill>
-          <a:ln w="9525" cap="flat" cmpd="sng">
-            <a:solidFill>
-              <a:schemeClr val="dk2"/>
-            </a:solidFill>
-            <a:prstDash val="solid"/>
-            <a:round/>
-            <a:headEnd type="none" w="sm" len="sm"/>
-            <a:tailEnd type="none" w="sm" len="sm"/>
-          </a:ln>
-        </p:spPr>
-        <p:txBody>
-          <a:bodyPr spcFirstLastPara="1" wrap="square" lIns="91425" tIns="91425" rIns="91425" bIns="91425" anchor="ctr" anchorCtr="0">
-            <a:noAutofit/>
-          </a:bodyPr>
-          <a:lstStyle/>
-          <a:p>
-            <a:pPr marL="0" lvl="0" indent="0" algn="ctr" rtl="0">
-              <a:spcBef>
-                <a:spcPts val="0"/>
-              </a:spcBef>
-              <a:spcAft>
-                <a:spcPts val="0"/>
-              </a:spcAft>
-              <a:buNone/>
-            </a:pPr>
-            <a:endParaRPr/>
-          </a:p>
-        </p:txBody>
-      </p:sp>
-    </p:spTree>
-  </p:cSld>
-  <p:clrMapOvr>
-    <a:masterClrMapping/>
-  </p:clrMapOvr>
-</p:sld>
-</file>
-
-<file path=ppt/slides/slide9.xml><?xml version="1.0" encoding="utf-8"?>
-<p:sld xmlns:a="http://schemas.openxmlformats.org/drawingml/2006/main" xmlns:r="http://schemas.openxmlformats.org/officeDocument/2006/relationships" xmlns:p="http://schemas.openxmlformats.org/presentationml/2006/main">
-  <p:cSld>
-    <p:spTree>
-      <p:nvGrpSpPr>
-        <p:cNvPr id="1" name="Shape 163"/>
-        <p:cNvGrpSpPr/>
-        <p:nvPr/>
-      </p:nvGrpSpPr>
-      <p:grpSpPr>
-        <a:xfrm>
-          <a:off x="0" y="0"/>
-          <a:ext cx="0" cy="0"/>
-          <a:chOff x="0" y="0"/>
-          <a:chExt cx="0" cy="0"/>
-        </a:xfrm>
-      </p:grpSpPr>
-      <p:sp>
-        <p:nvSpPr>
-          <p:cNvPr id="164" name="Google Shape;164;p22"/>
-          <p:cNvSpPr txBox="1"/>
-          <p:nvPr/>
-        </p:nvSpPr>
-        <p:spPr>
-          <a:xfrm>
-            <a:off x="5439489" y="55350"/>
-            <a:ext cx="1761300" cy="526500"/>
-          </a:xfrm>
-          <a:prstGeom prst="rect">
-            <a:avLst/>
-          </a:prstGeom>
-          <a:noFill/>
-          <a:ln>
-            <a:noFill/>
-          </a:ln>
-        </p:spPr>
-        <p:txBody>
-          <a:bodyPr spcFirstLastPara="1" wrap="square" lIns="9125" tIns="9125" rIns="9125" bIns="9125" anchor="t" anchorCtr="0">
-            <a:spAutoFit/>
-          </a:bodyPr>
-          <a:lstStyle/>
-          <a:p>
-            <a:pPr marL="0" marR="0" lvl="0" indent="0" algn="l" rtl="0">
-              <a:lnSpc>
-                <a:spcPct val="100000"/>
-              </a:lnSpc>
-              <a:spcBef>
-                <a:spcPts val="0"/>
-              </a:spcBef>
-              <a:spcAft>
-                <a:spcPts val="0"/>
-              </a:spcAft>
-              <a:buClr>
-                <a:schemeClr val="dk1"/>
-              </a:buClr>
-              <a:buSzPts val="1100"/>
-              <a:buFont typeface="Arial"/>
-              <a:buNone/>
-            </a:pPr>
-            <a:r>
-              <a:rPr lang="en" sz="1100">
-                <a:solidFill>
-                  <a:srgbClr val="1F2937"/>
-                </a:solidFill>
-                <a:highlight>
-                  <a:srgbClr val="FFFFFF"/>
-                </a:highlight>
-                <a:latin typeface="Calibri"/>
-                <a:ea typeface="Calibri"/>
-                <a:cs typeface="Calibri"/>
-                <a:sym typeface="Calibri"/>
-              </a:rPr>
-              <a:t>Total #models: 115.    </a:t>
-            </a:r>
-            <a:endParaRPr sz="1100">
-              <a:solidFill>
-                <a:srgbClr val="1F2937"/>
-              </a:solidFill>
-              <a:highlight>
-                <a:srgbClr val="FFFFFF"/>
-              </a:highlight>
-              <a:latin typeface="Calibri"/>
-              <a:ea typeface="Calibri"/>
-              <a:cs typeface="Calibri"/>
-              <a:sym typeface="Calibri"/>
-            </a:endParaRPr>
-          </a:p>
-          <a:p>
-            <a:pPr marL="0" marR="0" lvl="0" indent="0" algn="l" rtl="0">
-              <a:lnSpc>
-                <a:spcPct val="100000"/>
-              </a:lnSpc>
-              <a:spcBef>
-                <a:spcPts val="0"/>
-              </a:spcBef>
-              <a:spcAft>
-                <a:spcPts val="0"/>
-              </a:spcAft>
-              <a:buClr>
-                <a:schemeClr val="dk1"/>
-              </a:buClr>
-              <a:buSzPts val="1100"/>
-              <a:buFont typeface="Arial"/>
-              <a:buNone/>
-            </a:pPr>
-            <a:r>
-              <a:rPr lang="en" sz="1100">
-                <a:solidFill>
-                  <a:srgbClr val="1F2937"/>
-                </a:solidFill>
-                <a:highlight>
-                  <a:srgbClr val="FFFFFF"/>
-                </a:highlight>
-                <a:latin typeface="Calibri"/>
-                <a:ea typeface="Calibri"/>
-                <a:cs typeface="Calibri"/>
-                <a:sym typeface="Calibri"/>
-              </a:rPr>
-              <a:t>Total #votes: 1,450,208. </a:t>
-            </a:r>
-            <a:endParaRPr sz="1100">
-              <a:solidFill>
-                <a:srgbClr val="1F2937"/>
-              </a:solidFill>
-              <a:highlight>
-                <a:srgbClr val="FFFFFF"/>
-              </a:highlight>
-              <a:latin typeface="Calibri"/>
-              <a:ea typeface="Calibri"/>
-              <a:cs typeface="Calibri"/>
-              <a:sym typeface="Calibri"/>
-            </a:endParaRPr>
-          </a:p>
-          <a:p>
-            <a:pPr marL="0" marR="0" lvl="0" indent="0" algn="l" rtl="0">
-              <a:lnSpc>
-                <a:spcPct val="100000"/>
-              </a:lnSpc>
-              <a:spcBef>
-                <a:spcPts val="0"/>
-              </a:spcBef>
-              <a:spcAft>
-                <a:spcPts val="0"/>
-              </a:spcAft>
-              <a:buClr>
-                <a:schemeClr val="dk1"/>
-              </a:buClr>
-              <a:buSzPts val="1100"/>
-              <a:buFont typeface="Arial"/>
-              <a:buNone/>
-            </a:pPr>
-            <a:r>
-              <a:rPr lang="en" sz="1100">
-                <a:solidFill>
-                  <a:srgbClr val="1F2937"/>
-                </a:solidFill>
-                <a:highlight>
-                  <a:srgbClr val="FFFFFF"/>
-                </a:highlight>
-                <a:latin typeface="Calibri"/>
-                <a:ea typeface="Calibri"/>
-                <a:cs typeface="Calibri"/>
-                <a:sym typeface="Calibri"/>
-              </a:rPr>
-              <a:t>Last updated: 2024-07-08.</a:t>
-            </a:r>
-            <a:endParaRPr sz="1100" b="1">
-              <a:solidFill>
-                <a:srgbClr val="FF0000"/>
-              </a:solidFill>
-              <a:latin typeface="Calibri"/>
-              <a:ea typeface="Calibri"/>
-              <a:cs typeface="Calibri"/>
-              <a:sym typeface="Calibri"/>
-            </a:endParaRPr>
-          </a:p>
-        </p:txBody>
-      </p:sp>
-      <p:sp>
-        <p:nvSpPr>
-          <p:cNvPr id="165" name="Google Shape;165;p22"/>
-          <p:cNvSpPr txBox="1"/>
-          <p:nvPr/>
-        </p:nvSpPr>
-        <p:spPr>
-          <a:xfrm>
-            <a:off x="7261325" y="52350"/>
-            <a:ext cx="1831500" cy="387900"/>
-          </a:xfrm>
-          <a:prstGeom prst="rect">
-            <a:avLst/>
-          </a:prstGeom>
-          <a:solidFill>
-            <a:srgbClr val="FFF2CC"/>
-          </a:solidFill>
-          <a:ln w="9525" cap="flat" cmpd="sng">
-            <a:solidFill>
-              <a:srgbClr val="FF0000"/>
-            </a:solidFill>
-            <a:prstDash val="solid"/>
-            <a:round/>
-            <a:headEnd type="none" w="sm" len="sm"/>
-            <a:tailEnd type="none" w="sm" len="sm"/>
-          </a:ln>
-        </p:spPr>
-        <p:txBody>
-          <a:bodyPr spcFirstLastPara="1" wrap="square" lIns="9125" tIns="9125" rIns="9125" bIns="9125" anchor="t" anchorCtr="0">
-            <a:spAutoFit/>
-          </a:bodyPr>
-          <a:lstStyle/>
-          <a:p>
-            <a:pPr marL="0" marR="0" lvl="0" indent="0" algn="l" rtl="0">
-              <a:lnSpc>
-                <a:spcPct val="100000"/>
-              </a:lnSpc>
-              <a:spcBef>
-                <a:spcPts val="0"/>
-              </a:spcBef>
-              <a:spcAft>
-                <a:spcPts val="0"/>
-              </a:spcAft>
-              <a:buClr>
-                <a:schemeClr val="dk1"/>
-              </a:buClr>
-              <a:buSzPts val="1100"/>
-              <a:buFont typeface="Arial"/>
-              <a:buNone/>
-            </a:pPr>
-            <a:r>
-              <a:rPr lang="en" sz="1200" b="0" i="0" u="none" strike="noStrike" cap="none">
-                <a:solidFill>
-                  <a:schemeClr val="dk1"/>
-                </a:solidFill>
-                <a:latin typeface="Calibri"/>
-                <a:ea typeface="Calibri"/>
-                <a:cs typeface="Calibri"/>
-                <a:sym typeface="Calibri"/>
-              </a:rPr>
-              <a:t>Starting Elo rating = 1000</a:t>
-            </a:r>
-            <a:endParaRPr sz="1200" b="0" i="0" u="none" strike="noStrike" cap="none">
-              <a:solidFill>
-                <a:schemeClr val="dk1"/>
-              </a:solidFill>
-              <a:latin typeface="Calibri"/>
-              <a:ea typeface="Calibri"/>
-              <a:cs typeface="Calibri"/>
-              <a:sym typeface="Calibri"/>
-            </a:endParaRPr>
-          </a:p>
-          <a:p>
-            <a:pPr marL="0" marR="0" lvl="0" indent="0" algn="l" rtl="0">
-              <a:lnSpc>
-                <a:spcPct val="100000"/>
-              </a:lnSpc>
-              <a:spcBef>
-                <a:spcPts val="0"/>
-              </a:spcBef>
-              <a:spcAft>
-                <a:spcPts val="0"/>
-              </a:spcAft>
-              <a:buClr>
-                <a:schemeClr val="dk1"/>
-              </a:buClr>
-              <a:buSzPts val="1100"/>
-              <a:buFont typeface="Arial"/>
-              <a:buNone/>
-            </a:pPr>
-            <a:r>
-              <a:rPr lang="en" sz="1200" b="0" i="0" u="none" strike="noStrike" cap="none">
-                <a:solidFill>
-                  <a:schemeClr val="dk1"/>
-                </a:solidFill>
-                <a:latin typeface="Calibri"/>
-                <a:ea typeface="Calibri"/>
-                <a:cs typeface="Calibri"/>
-                <a:sym typeface="Calibri"/>
-              </a:rPr>
-              <a:t>95% CI = Confidence Interval</a:t>
-            </a:r>
-            <a:endParaRPr sz="1200" b="0" i="0" u="none" strike="noStrike" cap="none">
-              <a:solidFill>
-                <a:schemeClr val="dk1"/>
-              </a:solidFill>
-              <a:latin typeface="Calibri"/>
-              <a:ea typeface="Calibri"/>
-              <a:cs typeface="Calibri"/>
-              <a:sym typeface="Calibri"/>
-            </a:endParaRPr>
-          </a:p>
-        </p:txBody>
-      </p:sp>
-      <p:sp>
-        <p:nvSpPr>
-          <p:cNvPr id="166" name="Google Shape;166;p22"/>
-          <p:cNvSpPr txBox="1"/>
-          <p:nvPr/>
-        </p:nvSpPr>
-        <p:spPr>
-          <a:xfrm>
-            <a:off x="-38048" y="-108050"/>
-            <a:ext cx="4151700" cy="492600"/>
-          </a:xfrm>
-          <a:prstGeom prst="rect">
-            <a:avLst/>
-          </a:prstGeom>
-          <a:noFill/>
-          <a:ln>
-            <a:noFill/>
-          </a:ln>
-        </p:spPr>
-        <p:txBody>
-          <a:bodyPr spcFirstLastPara="1" wrap="square" lIns="91425" tIns="91425" rIns="91425" bIns="91425" anchor="t" anchorCtr="0">
-            <a:spAutoFit/>
-          </a:bodyPr>
-          <a:lstStyle/>
-          <a:p>
-            <a:pPr marL="0" marR="0" lvl="0" indent="0" algn="l" rtl="0">
-              <a:lnSpc>
-                <a:spcPct val="100000"/>
-              </a:lnSpc>
-              <a:spcBef>
-                <a:spcPts val="0"/>
-              </a:spcBef>
-              <a:spcAft>
-                <a:spcPts val="0"/>
-              </a:spcAft>
-              <a:buClr>
-                <a:srgbClr val="000000"/>
-              </a:buClr>
-              <a:buSzPts val="2000"/>
-              <a:buFont typeface="Arial"/>
-              <a:buNone/>
-            </a:pPr>
-            <a:r>
-              <a:rPr lang="en" sz="2000" b="1" i="0" u="none" strike="noStrike" cap="none">
-                <a:solidFill>
-                  <a:schemeClr val="dk1"/>
-                </a:solidFill>
-                <a:latin typeface="Calibri"/>
-                <a:ea typeface="Calibri"/>
-                <a:cs typeface="Calibri"/>
-                <a:sym typeface="Calibri"/>
-              </a:rPr>
-              <a:t>Crowd-sourced "Arena" Leaderboard</a:t>
-            </a:r>
-            <a:endParaRPr sz="2000" b="1" i="0" u="none" strike="noStrike" cap="none">
-              <a:solidFill>
-                <a:srgbClr val="000000"/>
-              </a:solidFill>
-              <a:latin typeface="Calibri"/>
-              <a:ea typeface="Calibri"/>
-              <a:cs typeface="Calibri"/>
-              <a:sym typeface="Calibri"/>
-            </a:endParaRPr>
-          </a:p>
-        </p:txBody>
-      </p:sp>
-      <p:sp>
-        <p:nvSpPr>
-          <p:cNvPr id="167" name="Google Shape;167;p22"/>
-          <p:cNvSpPr txBox="1"/>
-          <p:nvPr/>
-        </p:nvSpPr>
-        <p:spPr>
-          <a:xfrm>
-            <a:off x="0" y="157800"/>
-            <a:ext cx="2076900" cy="338700"/>
-          </a:xfrm>
-          <a:prstGeom prst="rect">
-            <a:avLst/>
-          </a:prstGeom>
-          <a:noFill/>
-          <a:ln>
-            <a:noFill/>
-          </a:ln>
-        </p:spPr>
-        <p:txBody>
-          <a:bodyPr spcFirstLastPara="1" wrap="square" lIns="91425" tIns="91425" rIns="91425" bIns="91425" anchor="t" anchorCtr="0">
-            <a:spAutoFit/>
-          </a:bodyPr>
-          <a:lstStyle/>
-          <a:p>
-            <a:pPr marL="0" marR="0" lvl="0" indent="0" algn="l" rtl="0">
-              <a:lnSpc>
-                <a:spcPct val="100000"/>
-              </a:lnSpc>
-              <a:spcBef>
-                <a:spcPts val="0"/>
-              </a:spcBef>
-              <a:spcAft>
-                <a:spcPts val="0"/>
-              </a:spcAft>
-              <a:buClr>
-                <a:schemeClr val="dk1"/>
-              </a:buClr>
-              <a:buSzPts val="1100"/>
-              <a:buFont typeface="Arial"/>
-              <a:buNone/>
-            </a:pPr>
-            <a:r>
-              <a:rPr lang="en" sz="1000" u="sng">
-                <a:solidFill>
-                  <a:schemeClr val="hlink"/>
-                </a:solidFill>
-                <a:latin typeface="Calibri"/>
-                <a:ea typeface="Calibri"/>
-                <a:cs typeface="Calibri"/>
-                <a:sym typeface="Calibri"/>
-                <a:hlinkClick r:id="rId3"/>
-              </a:rPr>
-              <a:t>https://chat.lmsys.org/?leaderboard</a:t>
-            </a:r>
-            <a:r>
-              <a:rPr lang="en" sz="1000">
-                <a:solidFill>
-                  <a:schemeClr val="dk1"/>
-                </a:solidFill>
-                <a:latin typeface="Calibri"/>
-                <a:ea typeface="Calibri"/>
-                <a:cs typeface="Calibri"/>
-                <a:sym typeface="Calibri"/>
-              </a:rPr>
-              <a:t> </a:t>
-            </a:r>
-            <a:r>
-              <a:rPr lang="en" sz="1000" b="0" i="0" u="none" strike="noStrike" cap="none">
-                <a:solidFill>
-                  <a:schemeClr val="dk1"/>
-                </a:solidFill>
-                <a:latin typeface="Calibri"/>
-                <a:ea typeface="Calibri"/>
-                <a:cs typeface="Calibri"/>
-                <a:sym typeface="Calibri"/>
-              </a:rPr>
-              <a:t> </a:t>
-            </a:r>
-            <a:endParaRPr sz="1000" b="0" i="0" u="none" strike="noStrike" cap="none">
-              <a:solidFill>
-                <a:schemeClr val="dk1"/>
-              </a:solidFill>
-              <a:latin typeface="Calibri"/>
-              <a:ea typeface="Calibri"/>
-              <a:cs typeface="Calibri"/>
-              <a:sym typeface="Calibri"/>
-            </a:endParaRPr>
-          </a:p>
-        </p:txBody>
-      </p:sp>
-      <p:sp>
-        <p:nvSpPr>
-          <p:cNvPr id="168" name="Google Shape;168;p22"/>
-          <p:cNvSpPr txBox="1"/>
-          <p:nvPr/>
-        </p:nvSpPr>
-        <p:spPr>
-          <a:xfrm>
-            <a:off x="3186581" y="444363"/>
-            <a:ext cx="552300" cy="203100"/>
-          </a:xfrm>
-          <a:prstGeom prst="rect">
-            <a:avLst/>
-          </a:prstGeom>
-          <a:solidFill>
-            <a:srgbClr val="FFF2CC"/>
-          </a:solidFill>
-          <a:ln w="9525" cap="flat" cmpd="sng">
-            <a:solidFill>
-              <a:srgbClr val="FF0000"/>
-            </a:solidFill>
-            <a:prstDash val="solid"/>
-            <a:round/>
-            <a:headEnd type="none" w="sm" len="sm"/>
-            <a:tailEnd type="none" w="sm" len="sm"/>
-          </a:ln>
-        </p:spPr>
-        <p:txBody>
-          <a:bodyPr spcFirstLastPara="1" wrap="square" lIns="9125" tIns="9125" rIns="9125" bIns="9125" anchor="t" anchorCtr="0">
-            <a:spAutoFit/>
-          </a:bodyPr>
-          <a:lstStyle/>
-          <a:p>
-            <a:pPr marL="0" marR="0" lvl="0" indent="0" algn="ctr" rtl="0">
-              <a:lnSpc>
-                <a:spcPct val="100000"/>
-              </a:lnSpc>
-              <a:spcBef>
-                <a:spcPts val="0"/>
-              </a:spcBef>
-              <a:spcAft>
-                <a:spcPts val="0"/>
-              </a:spcAft>
-              <a:buClr>
-                <a:schemeClr val="dk1"/>
-              </a:buClr>
-              <a:buSzPts val="1100"/>
-              <a:buFont typeface="Arial"/>
-              <a:buNone/>
-            </a:pPr>
-            <a:r>
-              <a:rPr lang="en" sz="1200" b="1">
-                <a:solidFill>
-                  <a:srgbClr val="FF0000"/>
-                </a:solidFill>
-                <a:latin typeface="Calibri"/>
-                <a:ea typeface="Calibri"/>
-                <a:cs typeface="Calibri"/>
-                <a:sym typeface="Calibri"/>
-              </a:rPr>
-              <a:t>Coding</a:t>
-            </a:r>
-            <a:endParaRPr sz="1200">
-              <a:solidFill>
-                <a:schemeClr val="dk1"/>
-              </a:solidFill>
-              <a:latin typeface="Calibri"/>
-              <a:ea typeface="Calibri"/>
-              <a:cs typeface="Calibri"/>
-              <a:sym typeface="Calibri"/>
-            </a:endParaRPr>
-          </a:p>
-        </p:txBody>
-      </p:sp>
-      <p:sp>
-        <p:nvSpPr>
-          <p:cNvPr id="169" name="Google Shape;169;p22"/>
-          <p:cNvSpPr/>
-          <p:nvPr/>
-        </p:nvSpPr>
-        <p:spPr>
-          <a:xfrm>
-            <a:off x="5235575" y="226378"/>
-            <a:ext cx="125400" cy="125400"/>
-          </a:xfrm>
-          <a:prstGeom prst="ellipse">
-            <a:avLst/>
-          </a:prstGeom>
-          <a:solidFill>
-            <a:srgbClr val="6AA84F"/>
-          </a:solidFill>
-          <a:ln w="9525" cap="flat" cmpd="sng">
-            <a:solidFill>
-              <a:schemeClr val="dk2"/>
-            </a:solidFill>
-            <a:prstDash val="solid"/>
-            <a:round/>
-            <a:headEnd type="none" w="sm" len="sm"/>
-            <a:tailEnd type="none" w="sm" len="sm"/>
-          </a:ln>
-        </p:spPr>
-        <p:txBody>
-          <a:bodyPr spcFirstLastPara="1" wrap="square" lIns="91425" tIns="91425" rIns="91425" bIns="91425" anchor="ctr" anchorCtr="0">
-            <a:noAutofit/>
-          </a:bodyPr>
-          <a:lstStyle/>
-          <a:p>
-            <a:pPr marL="0" lvl="0" indent="0" algn="ctr" rtl="0">
-              <a:spcBef>
-                <a:spcPts val="0"/>
-              </a:spcBef>
-              <a:spcAft>
-                <a:spcPts val="0"/>
-              </a:spcAft>
-              <a:buNone/>
-            </a:pPr>
-            <a:endParaRPr/>
-          </a:p>
-        </p:txBody>
-      </p:sp>
-      <p:sp>
-        <p:nvSpPr>
-          <p:cNvPr id="170" name="Google Shape;170;p22"/>
-          <p:cNvSpPr/>
-          <p:nvPr/>
-        </p:nvSpPr>
-        <p:spPr>
-          <a:xfrm>
-            <a:off x="448325" y="4306024"/>
-            <a:ext cx="125400" cy="125400"/>
-          </a:xfrm>
-          <a:prstGeom prst="ellipse">
-            <a:avLst/>
-          </a:prstGeom>
-          <a:solidFill>
-            <a:srgbClr val="6AA84F"/>
-          </a:solidFill>
-          <a:ln w="9525" cap="flat" cmpd="sng">
-            <a:solidFill>
-              <a:schemeClr val="dk2"/>
-            </a:solidFill>
-            <a:prstDash val="solid"/>
-            <a:round/>
-            <a:headEnd type="none" w="sm" len="sm"/>
-            <a:tailEnd type="none" w="sm" len="sm"/>
-          </a:ln>
-        </p:spPr>
-        <p:txBody>
-          <a:bodyPr spcFirstLastPara="1" wrap="square" lIns="91425" tIns="91425" rIns="91425" bIns="91425" anchor="ctr" anchorCtr="0">
-            <a:noAutofit/>
-          </a:bodyPr>
-          <a:lstStyle/>
-          <a:p>
-            <a:pPr marL="0" lvl="0" indent="0" algn="ctr" rtl="0">
-              <a:spcBef>
-                <a:spcPts val="0"/>
-              </a:spcBef>
-              <a:spcAft>
-                <a:spcPts val="0"/>
-              </a:spcAft>
-              <a:buNone/>
-            </a:pPr>
-            <a:endParaRPr/>
-          </a:p>
-        </p:txBody>
-      </p:sp>
-      <p:sp>
-        <p:nvSpPr>
-          <p:cNvPr id="171" name="Google Shape;171;p22"/>
-          <p:cNvSpPr/>
-          <p:nvPr/>
-        </p:nvSpPr>
-        <p:spPr>
-          <a:xfrm>
-            <a:off x="448325" y="3133840"/>
-            <a:ext cx="125400" cy="125400"/>
-          </a:xfrm>
-          <a:prstGeom prst="ellipse">
-            <a:avLst/>
-          </a:prstGeom>
-          <a:solidFill>
-            <a:srgbClr val="6AA84F"/>
-          </a:solidFill>
-          <a:ln w="9525" cap="flat" cmpd="sng">
-            <a:solidFill>
-              <a:schemeClr val="dk2"/>
-            </a:solidFill>
-            <a:prstDash val="solid"/>
-            <a:round/>
-            <a:headEnd type="none" w="sm" len="sm"/>
-            <a:tailEnd type="none" w="sm" len="sm"/>
-          </a:ln>
-        </p:spPr>
-        <p:txBody>
-          <a:bodyPr spcFirstLastPara="1" wrap="square" lIns="91425" tIns="91425" rIns="91425" bIns="91425" anchor="ctr" anchorCtr="0">
-            <a:noAutofit/>
-          </a:bodyPr>
-          <a:lstStyle/>
-          <a:p>
-            <a:pPr marL="0" lvl="0" indent="0" algn="ctr" rtl="0">
-              <a:spcBef>
-                <a:spcPts val="0"/>
-              </a:spcBef>
-              <a:spcAft>
-                <a:spcPts val="0"/>
-              </a:spcAft>
-              <a:buNone/>
-            </a:pPr>
-            <a:endParaRPr/>
-          </a:p>
-        </p:txBody>
-      </p:sp>
-      <p:sp>
-        <p:nvSpPr>
-          <p:cNvPr id="172" name="Google Shape;172;p22"/>
-          <p:cNvSpPr/>
-          <p:nvPr/>
-        </p:nvSpPr>
-        <p:spPr>
-          <a:xfrm>
-            <a:off x="4967342" y="1797320"/>
-            <a:ext cx="125400" cy="125400"/>
-          </a:xfrm>
-          <a:prstGeom prst="ellipse">
-            <a:avLst/>
-          </a:prstGeom>
-          <a:solidFill>
-            <a:srgbClr val="6AA84F"/>
-          </a:solidFill>
-          <a:ln w="9525" cap="flat" cmpd="sng">
-            <a:solidFill>
-              <a:schemeClr val="dk2"/>
-            </a:solidFill>
-            <a:prstDash val="solid"/>
-            <a:round/>
-            <a:headEnd type="none" w="sm" len="sm"/>
-            <a:tailEnd type="none" w="sm" len="sm"/>
-          </a:ln>
-        </p:spPr>
-        <p:txBody>
-          <a:bodyPr spcFirstLastPara="1" wrap="square" lIns="91425" tIns="91425" rIns="91425" bIns="91425" anchor="ctr" anchorCtr="0">
-            <a:noAutofit/>
-          </a:bodyPr>
-          <a:lstStyle/>
-          <a:p>
-            <a:pPr marL="0" lvl="0" indent="0" algn="ctr" rtl="0">
-              <a:spcBef>
-                <a:spcPts val="0"/>
-              </a:spcBef>
-              <a:spcAft>
-                <a:spcPts val="0"/>
-              </a:spcAft>
-              <a:buNone/>
-            </a:pPr>
-            <a:endParaRPr/>
-          </a:p>
-        </p:txBody>
-      </p:sp>
-      <p:sp>
-        <p:nvSpPr>
-          <p:cNvPr id="173" name="Google Shape;173;p22"/>
-          <p:cNvSpPr/>
-          <p:nvPr/>
-        </p:nvSpPr>
-        <p:spPr>
-          <a:xfrm>
-            <a:off x="4967342" y="2788733"/>
-            <a:ext cx="125400" cy="125400"/>
-          </a:xfrm>
-          <a:prstGeom prst="ellipse">
-            <a:avLst/>
-          </a:prstGeom>
-          <a:solidFill>
-            <a:srgbClr val="6AA84F"/>
-          </a:solidFill>
-          <a:ln w="9525" cap="flat" cmpd="sng">
-            <a:solidFill>
-              <a:schemeClr val="dk2"/>
-            </a:solidFill>
-            <a:prstDash val="solid"/>
-            <a:round/>
-            <a:headEnd type="none" w="sm" len="sm"/>
-            <a:tailEnd type="none" w="sm" len="sm"/>
-          </a:ln>
-        </p:spPr>
-        <p:txBody>
-          <a:bodyPr spcFirstLastPara="1" wrap="square" lIns="91425" tIns="91425" rIns="91425" bIns="91425" anchor="ctr" anchorCtr="0">
-            <a:noAutofit/>
-          </a:bodyPr>
-          <a:lstStyle/>
-          <a:p>
-            <a:pPr marL="0" lvl="0" indent="0" algn="ctr" rtl="0">
-              <a:spcBef>
-                <a:spcPts val="0"/>
-              </a:spcBef>
-              <a:spcAft>
-                <a:spcPts val="0"/>
-              </a:spcAft>
-              <a:buNone/>
-            </a:pPr>
-            <a:endParaRPr/>
-          </a:p>
-        </p:txBody>
-      </p:sp>
-      <p:sp>
-        <p:nvSpPr>
-          <p:cNvPr id="174" name="Google Shape;174;p22"/>
-          <p:cNvSpPr/>
-          <p:nvPr/>
-        </p:nvSpPr>
-        <p:spPr>
-          <a:xfrm>
-            <a:off x="4967342" y="3290066"/>
-            <a:ext cx="125400" cy="125400"/>
-          </a:xfrm>
-          <a:prstGeom prst="ellipse">
-            <a:avLst/>
-          </a:prstGeom>
-          <a:solidFill>
-            <a:srgbClr val="6AA84F"/>
-          </a:solidFill>
-          <a:ln w="9525" cap="flat" cmpd="sng">
-            <a:solidFill>
-              <a:schemeClr val="dk2"/>
-            </a:solidFill>
-            <a:prstDash val="solid"/>
-            <a:round/>
-            <a:headEnd type="none" w="sm" len="sm"/>
-            <a:tailEnd type="none" w="sm" len="sm"/>
-          </a:ln>
-        </p:spPr>
-        <p:txBody>
-          <a:bodyPr spcFirstLastPara="1" wrap="square" lIns="91425" tIns="91425" rIns="91425" bIns="91425" anchor="ctr" anchorCtr="0">
-            <a:noAutofit/>
-          </a:bodyPr>
-          <a:lstStyle/>
-          <a:p>
-            <a:pPr marL="0" lvl="0" indent="0" algn="ctr" rtl="0">
-              <a:spcBef>
-                <a:spcPts val="0"/>
-              </a:spcBef>
-              <a:spcAft>
-                <a:spcPts val="0"/>
-              </a:spcAft>
-              <a:buNone/>
-            </a:pPr>
-            <a:endParaRPr/>
-          </a:p>
-        </p:txBody>
-      </p:sp>
-      <p:sp>
-        <p:nvSpPr>
-          <p:cNvPr id="175" name="Google Shape;175;p22"/>
-          <p:cNvSpPr/>
-          <p:nvPr/>
-        </p:nvSpPr>
-        <p:spPr>
-          <a:xfrm>
-            <a:off x="4967342" y="4540910"/>
-            <a:ext cx="125400" cy="125400"/>
-          </a:xfrm>
-          <a:prstGeom prst="ellipse">
-            <a:avLst/>
-          </a:prstGeom>
-          <a:solidFill>
-            <a:srgbClr val="6AA84F"/>
-          </a:solidFill>
-          <a:ln w="9525" cap="flat" cmpd="sng">
-            <a:solidFill>
-              <a:schemeClr val="dk2"/>
-            </a:solidFill>
-            <a:prstDash val="solid"/>
-            <a:round/>
-            <a:headEnd type="none" w="sm" len="sm"/>
-            <a:tailEnd type="none" w="sm" len="sm"/>
-          </a:ln>
-        </p:spPr>
-        <p:txBody>
-          <a:bodyPr spcFirstLastPara="1" wrap="square" lIns="91425" tIns="91425" rIns="91425" bIns="91425" anchor="ctr" anchorCtr="0">
-            <a:noAutofit/>
-          </a:bodyPr>
-          <a:lstStyle/>
-          <a:p>
-            <a:pPr marL="0" lvl="0" indent="0" algn="ctr" rtl="0">
-              <a:spcBef>
-                <a:spcPts val="0"/>
-              </a:spcBef>
-              <a:spcAft>
-                <a:spcPts val="0"/>
-              </a:spcAft>
-              <a:buNone/>
-            </a:pPr>
-            <a:endParaRPr/>
-          </a:p>
-        </p:txBody>
-      </p:sp>
-      <p:sp>
-        <p:nvSpPr>
-          <p:cNvPr id="176" name="Google Shape;176;p22"/>
-          <p:cNvSpPr txBox="1"/>
-          <p:nvPr/>
-        </p:nvSpPr>
-        <p:spPr>
-          <a:xfrm>
-            <a:off x="5439489" y="55350"/>
-            <a:ext cx="1761300" cy="526500"/>
-          </a:xfrm>
-          <a:prstGeom prst="rect">
-            <a:avLst/>
-          </a:prstGeom>
-          <a:noFill/>
-          <a:ln w="9525" cap="flat" cmpd="sng">
-            <a:solidFill>
-              <a:srgbClr val="FF0000"/>
-            </a:solidFill>
-            <a:prstDash val="solid"/>
-            <a:round/>
-            <a:headEnd type="none" w="sm" len="sm"/>
-            <a:tailEnd type="none" w="sm" len="sm"/>
-          </a:ln>
-        </p:spPr>
-        <p:txBody>
-          <a:bodyPr spcFirstLastPara="1" wrap="square" lIns="9125" tIns="9125" rIns="9125" bIns="9125" anchor="t" anchorCtr="0">
-            <a:spAutoFit/>
-          </a:bodyPr>
-          <a:lstStyle/>
-          <a:p>
-            <a:pPr marL="0" marR="0" lvl="0" indent="0" algn="l" rtl="0">
-              <a:lnSpc>
-                <a:spcPct val="100000"/>
-              </a:lnSpc>
-              <a:spcBef>
-                <a:spcPts val="0"/>
-              </a:spcBef>
-              <a:spcAft>
-                <a:spcPts val="0"/>
-              </a:spcAft>
-              <a:buClr>
-                <a:schemeClr val="dk1"/>
-              </a:buClr>
-              <a:buSzPts val="1100"/>
-              <a:buFont typeface="Arial"/>
-              <a:buNone/>
-            </a:pPr>
-            <a:r>
-              <a:rPr lang="en" sz="1100">
-                <a:solidFill>
-                  <a:srgbClr val="1F2937"/>
-                </a:solidFill>
-                <a:highlight>
-                  <a:srgbClr val="FFFFFF"/>
-                </a:highlight>
-                <a:latin typeface="Calibri"/>
-                <a:ea typeface="Calibri"/>
-                <a:cs typeface="Calibri"/>
-                <a:sym typeface="Calibri"/>
-              </a:rPr>
-              <a:t>Total #models: 121.    </a:t>
-            </a:r>
-            <a:endParaRPr sz="1100">
-              <a:solidFill>
-                <a:srgbClr val="1F2937"/>
-              </a:solidFill>
-              <a:highlight>
-                <a:srgbClr val="FFFFFF"/>
-              </a:highlight>
-              <a:latin typeface="Calibri"/>
-              <a:ea typeface="Calibri"/>
-              <a:cs typeface="Calibri"/>
-              <a:sym typeface="Calibri"/>
-            </a:endParaRPr>
-          </a:p>
-          <a:p>
-            <a:pPr marL="0" marR="0" lvl="0" indent="0" algn="l" rtl="0">
-              <a:lnSpc>
-                <a:spcPct val="100000"/>
-              </a:lnSpc>
-              <a:spcBef>
-                <a:spcPts val="0"/>
-              </a:spcBef>
-              <a:spcAft>
-                <a:spcPts val="0"/>
-              </a:spcAft>
-              <a:buClr>
-                <a:schemeClr val="dk1"/>
-              </a:buClr>
-              <a:buSzPts val="1100"/>
-              <a:buFont typeface="Arial"/>
-              <a:buNone/>
-            </a:pPr>
-            <a:r>
-              <a:rPr lang="en" sz="1100">
-                <a:solidFill>
-                  <a:srgbClr val="1F2937"/>
-                </a:solidFill>
-                <a:highlight>
-                  <a:srgbClr val="FFFFFF"/>
-                </a:highlight>
-                <a:latin typeface="Calibri"/>
-                <a:ea typeface="Calibri"/>
-                <a:cs typeface="Calibri"/>
-                <a:sym typeface="Calibri"/>
-              </a:rPr>
-              <a:t>Total #votes: 1,552,386.    </a:t>
-            </a:r>
-            <a:endParaRPr sz="1100">
-              <a:solidFill>
-                <a:srgbClr val="1F2937"/>
-              </a:solidFill>
-              <a:highlight>
-                <a:srgbClr val="FFFFFF"/>
-              </a:highlight>
-              <a:latin typeface="Calibri"/>
-              <a:ea typeface="Calibri"/>
-              <a:cs typeface="Calibri"/>
-              <a:sym typeface="Calibri"/>
-            </a:endParaRPr>
-          </a:p>
-          <a:p>
-            <a:pPr marL="0" marR="0" lvl="0" indent="0" algn="l" rtl="0">
-              <a:lnSpc>
-                <a:spcPct val="100000"/>
-              </a:lnSpc>
-              <a:spcBef>
-                <a:spcPts val="0"/>
-              </a:spcBef>
-              <a:spcAft>
-                <a:spcPts val="0"/>
-              </a:spcAft>
-              <a:buClr>
-                <a:schemeClr val="dk1"/>
-              </a:buClr>
-              <a:buSzPts val="1100"/>
-              <a:buFont typeface="Arial"/>
-              <a:buNone/>
-            </a:pPr>
-            <a:r>
-              <a:rPr lang="en" sz="1100">
-                <a:solidFill>
-                  <a:srgbClr val="1F2937"/>
-                </a:solidFill>
-                <a:highlight>
-                  <a:srgbClr val="FFFFFF"/>
-                </a:highlight>
-                <a:latin typeface="Calibri"/>
-                <a:ea typeface="Calibri"/>
-                <a:cs typeface="Calibri"/>
-                <a:sym typeface="Calibri"/>
-              </a:rPr>
-              <a:t>Last updated: 2024-07-29.</a:t>
-            </a:r>
-            <a:endParaRPr sz="1100" b="1">
-              <a:solidFill>
-                <a:srgbClr val="FF0000"/>
-              </a:solidFill>
-              <a:latin typeface="Calibri"/>
-              <a:ea typeface="Calibri"/>
-              <a:cs typeface="Calibri"/>
-              <a:sym typeface="Calibri"/>
-            </a:endParaRPr>
-          </a:p>
-        </p:txBody>
-      </p:sp>
-      <p:sp>
-        <p:nvSpPr>
-          <p:cNvPr id="177" name="Google Shape;177;p22"/>
-          <p:cNvSpPr/>
-          <p:nvPr/>
-        </p:nvSpPr>
-        <p:spPr>
-          <a:xfrm>
-            <a:off x="448325" y="4088834"/>
-            <a:ext cx="125400" cy="125400"/>
-          </a:xfrm>
-          <a:prstGeom prst="ellipse">
-            <a:avLst/>
-          </a:prstGeom>
-          <a:solidFill>
-            <a:srgbClr val="6AA84F"/>
-          </a:solidFill>
-          <a:ln w="9525" cap="flat" cmpd="sng">
-            <a:solidFill>
-              <a:schemeClr val="dk2"/>
-            </a:solidFill>
-            <a:prstDash val="solid"/>
-            <a:round/>
-            <a:headEnd type="none" w="sm" len="sm"/>
-            <a:tailEnd type="none" w="sm" len="sm"/>
-          </a:ln>
-        </p:spPr>
-        <p:txBody>
-          <a:bodyPr spcFirstLastPara="1" wrap="square" lIns="91425" tIns="91425" rIns="91425" bIns="91425" anchor="ctr" anchorCtr="0">
-            <a:noAutofit/>
-          </a:bodyPr>
-          <a:lstStyle/>
-          <a:p>
-            <a:pPr marL="0" lvl="0" indent="0" algn="ctr" rtl="0">
-              <a:spcBef>
-                <a:spcPts val="0"/>
-              </a:spcBef>
-              <a:spcAft>
-                <a:spcPts val="0"/>
-              </a:spcAft>
-              <a:buNone/>
-            </a:pPr>
-            <a:endParaRPr/>
-          </a:p>
-        </p:txBody>
-      </p:sp>
-      <p:sp>
-        <p:nvSpPr>
-          <p:cNvPr id="178" name="Google Shape;178;p22"/>
-          <p:cNvSpPr/>
-          <p:nvPr/>
-        </p:nvSpPr>
-        <p:spPr>
-          <a:xfrm>
-            <a:off x="4967342" y="2295267"/>
-            <a:ext cx="125400" cy="125400"/>
-          </a:xfrm>
-          <a:prstGeom prst="ellipse">
-            <a:avLst/>
-          </a:prstGeom>
-          <a:solidFill>
-            <a:srgbClr val="6AA84F"/>
-          </a:solidFill>
-          <a:ln w="9525" cap="flat" cmpd="sng">
-            <a:solidFill>
-              <a:schemeClr val="dk2"/>
-            </a:solidFill>
-            <a:prstDash val="solid"/>
-            <a:round/>
-            <a:headEnd type="none" w="sm" len="sm"/>
-            <a:tailEnd type="none" w="sm" len="sm"/>
-          </a:ln>
-        </p:spPr>
-        <p:txBody>
-          <a:bodyPr spcFirstLastPara="1" wrap="square" lIns="91425" tIns="91425" rIns="91425" bIns="91425" anchor="ctr" anchorCtr="0">
-            <a:noAutofit/>
-          </a:bodyPr>
-          <a:lstStyle/>
-          <a:p>
-            <a:pPr marL="0" lvl="0" indent="0" algn="ctr" rtl="0">
-              <a:spcBef>
-                <a:spcPts val="0"/>
-              </a:spcBef>
-              <a:spcAft>
-                <a:spcPts val="0"/>
-              </a:spcAft>
-              <a:buNone/>
-            </a:pPr>
-            <a:endParaRPr/>
-          </a:p>
-        </p:txBody>
-      </p:sp>
-      <p:sp>
-        <p:nvSpPr>
-          <p:cNvPr id="179" name="Google Shape;179;p22"/>
-          <p:cNvSpPr/>
-          <p:nvPr/>
-        </p:nvSpPr>
-        <p:spPr>
-          <a:xfrm>
-            <a:off x="4967342" y="4031692"/>
-            <a:ext cx="125400" cy="125400"/>
-          </a:xfrm>
-          <a:prstGeom prst="ellipse">
-            <a:avLst/>
-          </a:prstGeom>
-          <a:solidFill>
-            <a:srgbClr val="6AA84F"/>
-          </a:solidFill>
-          <a:ln w="9525" cap="flat" cmpd="sng">
-            <a:solidFill>
-              <a:schemeClr val="dk2"/>
-            </a:solidFill>
-            <a:prstDash val="solid"/>
-            <a:round/>
-            <a:headEnd type="none" w="sm" len="sm"/>
-            <a:tailEnd type="none" w="sm" len="sm"/>
-          </a:ln>
-        </p:spPr>
-        <p:txBody>
-          <a:bodyPr spcFirstLastPara="1" wrap="square" lIns="91425" tIns="91425" rIns="91425" bIns="91425" anchor="ctr" anchorCtr="0">
-            <a:noAutofit/>
-          </a:bodyPr>
-          <a:lstStyle/>
-          <a:p>
-            <a:pPr marL="0" lvl="0" indent="0" algn="ctr" rtl="0">
-              <a:spcBef>
-                <a:spcPts val="0"/>
-              </a:spcBef>
-              <a:spcAft>
-                <a:spcPts val="0"/>
-              </a:spcAft>
-              <a:buNone/>
-            </a:pPr>
-            <a:endParaRPr/>
-          </a:p>
-        </p:txBody>
-      </p:sp>
-      <p:pic>
-        <p:nvPicPr>
-          <p:cNvPr id="180" name="Google Shape;180;p22"/>
-          <p:cNvPicPr preferRelativeResize="0"/>
-          <p:nvPr/>
-        </p:nvPicPr>
-        <p:blipFill>
-          <a:blip r:embed="rId4" cstate="email">
-            <a:alphaModFix/>
-            <a:extLst>
-              <a:ext uri="{28A0092B-C50C-407E-A947-70E740481C1C}">
-                <a14:useLocalDpi xmlns:a14="http://schemas.microsoft.com/office/drawing/2010/main"/>
-              </a:ext>
-            </a:extLst>
-          </a:blip>
-          <a:stretch>
-            <a:fillRect/>
-          </a:stretch>
-        </p:blipFill>
-        <p:spPr>
-          <a:xfrm>
-            <a:off x="651675" y="799863"/>
-            <a:ext cx="3224654" cy="4191238"/>
-          </a:xfrm>
-          <a:prstGeom prst="rect">
-            <a:avLst/>
-          </a:prstGeom>
-          <a:noFill/>
-          <a:ln w="9525" cap="flat" cmpd="sng">
-            <a:solidFill>
-              <a:srgbClr val="FF0000"/>
-            </a:solidFill>
-            <a:prstDash val="solid"/>
-            <a:round/>
-            <a:headEnd type="none" w="sm" len="sm"/>
-            <a:tailEnd type="none" w="sm" len="sm"/>
-          </a:ln>
-        </p:spPr>
-      </p:pic>
-      <p:pic>
-        <p:nvPicPr>
-          <p:cNvPr id="181" name="Google Shape;181;p22"/>
-          <p:cNvPicPr preferRelativeResize="0"/>
-          <p:nvPr/>
-        </p:nvPicPr>
-        <p:blipFill>
-          <a:blip r:embed="rId5" cstate="email">
-            <a:alphaModFix/>
-            <a:extLst>
-              <a:ext uri="{28A0092B-C50C-407E-A947-70E740481C1C}">
-                <a14:useLocalDpi xmlns:a14="http://schemas.microsoft.com/office/drawing/2010/main"/>
-              </a:ext>
-            </a:extLst>
-          </a:blip>
-          <a:stretch>
-            <a:fillRect/>
-          </a:stretch>
-        </p:blipFill>
-        <p:spPr>
-          <a:xfrm>
-            <a:off x="5168942" y="734250"/>
-            <a:ext cx="3313666" cy="4256850"/>
-          </a:xfrm>
-          <a:prstGeom prst="rect">
-            <a:avLst/>
-          </a:prstGeom>
-          <a:noFill/>
-          <a:ln w="9525" cap="flat" cmpd="sng">
-            <a:solidFill>
-              <a:srgbClr val="FF0000"/>
-            </a:solidFill>
-            <a:prstDash val="solid"/>
-            <a:round/>
-            <a:headEnd type="none" w="sm" len="sm"/>
-            <a:tailEnd type="none" w="sm" len="sm"/>
-          </a:ln>
-        </p:spPr>
-      </p:pic>
-      <p:sp>
-        <p:nvSpPr>
-          <p:cNvPr id="182" name="Google Shape;182;p22"/>
-          <p:cNvSpPr/>
-          <p:nvPr/>
-        </p:nvSpPr>
-        <p:spPr>
-          <a:xfrm>
-            <a:off x="448334" y="1922755"/>
-            <a:ext cx="125400" cy="125400"/>
-          </a:xfrm>
-          <a:prstGeom prst="ellipse">
-            <a:avLst/>
-          </a:prstGeom>
-          <a:solidFill>
-            <a:srgbClr val="6AA84F"/>
-          </a:solidFill>
-          <a:ln w="9525" cap="flat" cmpd="sng">
-            <a:solidFill>
-              <a:schemeClr val="dk2"/>
-            </a:solidFill>
-            <a:prstDash val="solid"/>
-            <a:round/>
-            <a:headEnd type="none" w="sm" len="sm"/>
-            <a:tailEnd type="none" w="sm" len="sm"/>
-          </a:ln>
-        </p:spPr>
-        <p:txBody>
-          <a:bodyPr spcFirstLastPara="1" wrap="square" lIns="91425" tIns="91425" rIns="91425" bIns="91425" anchor="ctr" anchorCtr="0">
-            <a:noAutofit/>
-          </a:bodyPr>
-          <a:lstStyle/>
-          <a:p>
-            <a:pPr marL="0" lvl="0" indent="0" algn="ctr" rtl="0">
-              <a:spcBef>
-                <a:spcPts val="0"/>
-              </a:spcBef>
-              <a:spcAft>
-                <a:spcPts val="0"/>
-              </a:spcAft>
-              <a:buNone/>
-            </a:pPr>
-            <a:endParaRPr/>
-          </a:p>
-        </p:txBody>
-      </p:sp>
-      <p:sp>
-        <p:nvSpPr>
-          <p:cNvPr id="183" name="Google Shape;183;p22"/>
-          <p:cNvSpPr/>
-          <p:nvPr/>
-        </p:nvSpPr>
-        <p:spPr>
-          <a:xfrm>
-            <a:off x="168109" y="1883291"/>
-            <a:ext cx="213600" cy="203100"/>
-          </a:xfrm>
-          <a:prstGeom prst="star5">
-            <a:avLst>
-              <a:gd name="adj" fmla="val 19098"/>
-              <a:gd name="hf" fmla="val 105146"/>
-              <a:gd name="vf" fmla="val 110557"/>
-            </a:avLst>
-          </a:prstGeom>
-          <a:solidFill>
-            <a:srgbClr val="FF0000"/>
-          </a:solidFill>
-          <a:ln w="9525" cap="flat" cmpd="sng">
-            <a:solidFill>
-              <a:schemeClr val="dk2"/>
-            </a:solidFill>
-            <a:prstDash val="solid"/>
-            <a:round/>
-            <a:headEnd type="none" w="sm" len="sm"/>
-            <a:tailEnd type="none" w="sm" len="sm"/>
-          </a:ln>
-        </p:spPr>
-        <p:txBody>
-          <a:bodyPr spcFirstLastPara="1" wrap="square" lIns="91425" tIns="91425" rIns="91425" bIns="91425" anchor="ctr" anchorCtr="0">
-            <a:noAutofit/>
-          </a:bodyPr>
-          <a:lstStyle/>
-          <a:p>
-            <a:pPr marL="0" lvl="0" indent="0" algn="ctr" rtl="0">
-              <a:spcBef>
-                <a:spcPts val="0"/>
-              </a:spcBef>
-              <a:spcAft>
-                <a:spcPts val="0"/>
-              </a:spcAft>
-              <a:buNone/>
-            </a:pPr>
-            <a:endParaRPr/>
-          </a:p>
-        </p:txBody>
-      </p:sp>
-      <p:sp>
-        <p:nvSpPr>
-          <p:cNvPr id="184" name="Google Shape;184;p22"/>
-          <p:cNvSpPr/>
-          <p:nvPr/>
-        </p:nvSpPr>
-        <p:spPr>
-          <a:xfrm>
-            <a:off x="448325" y="4578691"/>
-            <a:ext cx="125400" cy="125400"/>
-          </a:xfrm>
-          <a:prstGeom prst="ellipse">
-            <a:avLst/>
-          </a:prstGeom>
-          <a:solidFill>
-            <a:srgbClr val="6AA84F"/>
-          </a:solidFill>
-          <a:ln w="9525" cap="flat" cmpd="sng">
-            <a:solidFill>
-              <a:schemeClr val="dk2"/>
-            </a:solidFill>
-            <a:prstDash val="solid"/>
-            <a:round/>
-            <a:headEnd type="none" w="sm" len="sm"/>
-            <a:tailEnd type="none" w="sm" len="sm"/>
-          </a:ln>
-        </p:spPr>
-        <p:txBody>
-          <a:bodyPr spcFirstLastPara="1" wrap="square" lIns="91425" tIns="91425" rIns="91425" bIns="91425" anchor="ctr" anchorCtr="0">
-            <a:noAutofit/>
-          </a:bodyPr>
-          <a:lstStyle/>
-          <a:p>
-            <a:pPr marL="0" lvl="0" indent="0" algn="ctr" rtl="0">
-              <a:spcBef>
-                <a:spcPts val="0"/>
-              </a:spcBef>
-              <a:spcAft>
-                <a:spcPts val="0"/>
-              </a:spcAft>
-              <a:buNone/>
-            </a:pPr>
-            <a:endParaRPr/>
-          </a:p>
-        </p:txBody>
-      </p:sp>
-      <p:sp>
-        <p:nvSpPr>
-          <p:cNvPr id="185" name="Google Shape;185;p22"/>
-          <p:cNvSpPr/>
-          <p:nvPr/>
-        </p:nvSpPr>
-        <p:spPr>
-          <a:xfrm>
-            <a:off x="4967342" y="4769510"/>
-            <a:ext cx="125400" cy="125400"/>
-          </a:xfrm>
-          <a:prstGeom prst="ellipse">
-            <a:avLst/>
-          </a:prstGeom>
-          <a:solidFill>
-            <a:srgbClr val="6AA84F"/>
-          </a:solidFill>
-          <a:ln w="9525" cap="flat" cmpd="sng">
-            <a:solidFill>
-              <a:schemeClr val="dk2"/>
-            </a:solidFill>
-            <a:prstDash val="solid"/>
-            <a:round/>
-            <a:headEnd type="none" w="sm" len="sm"/>
-            <a:tailEnd type="none" w="sm" len="sm"/>
-          </a:ln>
-        </p:spPr>
-        <p:txBody>
-          <a:bodyPr spcFirstLastPara="1" wrap="square" lIns="91425" tIns="91425" rIns="91425" bIns="91425" anchor="ctr" anchorCtr="0">
-            <a:noAutofit/>
-          </a:bodyPr>
-          <a:lstStyle/>
-          <a:p>
-            <a:pPr marL="0" lvl="0" indent="0" algn="ctr" rtl="0">
-              <a:spcBef>
-                <a:spcPts val="0"/>
-              </a:spcBef>
-              <a:spcAft>
-                <a:spcPts val="0"/>
-              </a:spcAft>
-              <a:buNone/>
-            </a:pPr>
-            <a:endParaRPr/>
-          </a:p>
-        </p:txBody>
-      </p:sp>
-      <p:sp>
-        <p:nvSpPr>
-          <p:cNvPr id="186" name="Google Shape;186;p22"/>
-          <p:cNvSpPr/>
-          <p:nvPr/>
-        </p:nvSpPr>
-        <p:spPr>
-          <a:xfrm>
-            <a:off x="4967342" y="2551425"/>
-            <a:ext cx="125400" cy="125400"/>
-          </a:xfrm>
-          <a:prstGeom prst="ellipse">
-            <a:avLst/>
-          </a:prstGeom>
-          <a:solidFill>
-            <a:srgbClr val="6AA84F"/>
           </a:solidFill>
           <a:ln w="9525" cap="flat" cmpd="sng">
             <a:solidFill>
